--- a/Especializacion/Proyecto I/Clases/Sesion 03 - Objetivos, justificación, alcances y limitaciones/Presentacion.pptx
+++ b/Especializacion/Proyecto I/Clases/Sesion 03 - Objetivos, justificación, alcances y limitaciones/Presentacion.pptx
@@ -3361,41 +3361,6 @@
                 <a:latin typeface="Calibri"/>
               </a:rPr>
               <a:t> PROYECTO I</a:t>
-            </a:r>
-          </a:p>
-        </p:txBody>
-      </p:sp>
-      <p:sp>
-        <p:nvSpPr>
-          <p:cNvPr id="7" name="TextBox 6"/>
-          <p:cNvSpPr txBox="1"/>
-          <p:nvPr/>
-        </p:nvSpPr>
-        <p:spPr>
-          <a:xfrm>
-            <a:off x="2194560" y="6446520"/>
-            <a:ext cx="5943600" cy="274320"/>
-          </a:xfrm>
-          <a:prstGeom prst="rect">
-            <a:avLst/>
-          </a:prstGeom>
-          <a:noFill/>
-        </p:spPr>
-        <p:txBody>
-          <a:bodyPr wrap="square" anchor="t" lIns="0" rIns="0" tIns="0" bIns="0">
-            <a:spAutoFit/>
-          </a:bodyPr>
-          <a:lstStyle/>
-          <a:p>
-            <a:pPr algn="l"/>
-            <a:r>
-              <a:rPr sz="1000" b="1" i="0">
-                <a:solidFill>
-                  <a:srgbClr val="8F989D"/>
-                </a:solidFill>
-                <a:latin typeface="Calibri"/>
-              </a:rPr>
-              <a:t>Inicio 8:10 pm</a:t>
             </a:r>
           </a:p>
         </p:txBody>
@@ -3960,41 +3925,6 @@
       <p:sp>
         <p:nvSpPr>
           <p:cNvPr id="6" name="TextBox 5"/>
-          <p:cNvSpPr txBox="1"/>
-          <p:nvPr/>
-        </p:nvSpPr>
-        <p:spPr>
-          <a:xfrm>
-            <a:off x="2194560" y="6446520"/>
-            <a:ext cx="5943600" cy="274320"/>
-          </a:xfrm>
-          <a:prstGeom prst="rect">
-            <a:avLst/>
-          </a:prstGeom>
-          <a:noFill/>
-        </p:spPr>
-        <p:txBody>
-          <a:bodyPr wrap="square" anchor="t" lIns="0" rIns="0" tIns="0" bIns="0">
-            <a:spAutoFit/>
-          </a:bodyPr>
-          <a:lstStyle/>
-          <a:p>
-            <a:pPr algn="l"/>
-            <a:r>
-              <a:rPr sz="1000" b="1" i="0">
-                <a:solidFill>
-                  <a:srgbClr val="8F989D"/>
-                </a:solidFill>
-                <a:latin typeface="Calibri"/>
-              </a:rPr>
-              <a:t>Inicio 8:10 pm</a:t>
-            </a:r>
-          </a:p>
-        </p:txBody>
-      </p:sp>
-      <p:sp>
-        <p:nvSpPr>
-          <p:cNvPr id="7" name="TextBox 6"/>
           <p:cNvSpPr txBox="1"/>
           <p:nvPr/>
         </p:nvSpPr>
@@ -4663,41 +4593,6 @@
         </p:nvSpPr>
         <p:spPr>
           <a:xfrm>
-            <a:off x="2194560" y="6446520"/>
-            <a:ext cx="5943600" cy="274320"/>
-          </a:xfrm>
-          <a:prstGeom prst="rect">
-            <a:avLst/>
-          </a:prstGeom>
-          <a:noFill/>
-        </p:spPr>
-        <p:txBody>
-          <a:bodyPr wrap="square" anchor="t" lIns="0" rIns="0" tIns="0" bIns="0">
-            <a:spAutoFit/>
-          </a:bodyPr>
-          <a:lstStyle/>
-          <a:p>
-            <a:pPr algn="l"/>
-            <a:r>
-              <a:rPr sz="1000" b="1" i="0">
-                <a:solidFill>
-                  <a:srgbClr val="8F989D"/>
-                </a:solidFill>
-                <a:latin typeface="Calibri"/>
-              </a:rPr>
-              <a:t>Inicio 8:10 pm</a:t>
-            </a:r>
-          </a:p>
-        </p:txBody>
-      </p:sp>
-      <p:sp>
-        <p:nvSpPr>
-          <p:cNvPr id="7" name="TextBox 6"/>
-          <p:cNvSpPr txBox="1"/>
-          <p:nvPr/>
-        </p:nvSpPr>
-        <p:spPr>
-          <a:xfrm>
             <a:off x="11094415" y="6446520"/>
             <a:ext cx="548640" cy="274320"/>
           </a:xfrm>
@@ -5165,41 +5060,6 @@
         </p:nvSpPr>
         <p:spPr>
           <a:xfrm>
-            <a:off x="2194560" y="6446520"/>
-            <a:ext cx="5943600" cy="274320"/>
-          </a:xfrm>
-          <a:prstGeom prst="rect">
-            <a:avLst/>
-          </a:prstGeom>
-          <a:noFill/>
-        </p:spPr>
-        <p:txBody>
-          <a:bodyPr wrap="square" anchor="t" lIns="0" rIns="0" tIns="0" bIns="0">
-            <a:spAutoFit/>
-          </a:bodyPr>
-          <a:lstStyle/>
-          <a:p>
-            <a:pPr algn="l"/>
-            <a:r>
-              <a:rPr sz="1000" b="1" i="0">
-                <a:solidFill>
-                  <a:srgbClr val="8F989D"/>
-                </a:solidFill>
-                <a:latin typeface="Calibri"/>
-              </a:rPr>
-              <a:t>Inicio 8:10 pm</a:t>
-            </a:r>
-          </a:p>
-        </p:txBody>
-      </p:sp>
-      <p:sp>
-        <p:nvSpPr>
-          <p:cNvPr id="11" name="TextBox 10"/>
-          <p:cNvSpPr txBox="1"/>
-          <p:nvPr/>
-        </p:nvSpPr>
-        <p:spPr>
-          <a:xfrm>
             <a:off x="11094415" y="6446520"/>
             <a:ext cx="548640" cy="274320"/>
           </a:xfrm>
@@ -5443,41 +5303,6 @@
         </p:nvSpPr>
         <p:spPr>
           <a:xfrm>
-            <a:off x="2194560" y="6446520"/>
-            <a:ext cx="5943600" cy="274320"/>
-          </a:xfrm>
-          <a:prstGeom prst="rect">
-            <a:avLst/>
-          </a:prstGeom>
-          <a:noFill/>
-        </p:spPr>
-        <p:txBody>
-          <a:bodyPr wrap="square" anchor="t" lIns="0" rIns="0" tIns="0" bIns="0">
-            <a:spAutoFit/>
-          </a:bodyPr>
-          <a:lstStyle/>
-          <a:p>
-            <a:pPr algn="l"/>
-            <a:r>
-              <a:rPr sz="1000" b="1" i="0">
-                <a:solidFill>
-                  <a:srgbClr val="8F989D"/>
-                </a:solidFill>
-                <a:latin typeface="Calibri"/>
-              </a:rPr>
-              <a:t>Inicio 8:10 pm</a:t>
-            </a:r>
-          </a:p>
-        </p:txBody>
-      </p:sp>
-      <p:sp>
-        <p:nvSpPr>
-          <p:cNvPr id="7" name="TextBox 6"/>
-          <p:cNvSpPr txBox="1"/>
-          <p:nvPr/>
-        </p:nvSpPr>
-        <p:spPr>
-          <a:xfrm>
             <a:off x="11094415" y="6446520"/>
             <a:ext cx="548640" cy="274320"/>
           </a:xfrm>
@@ -5949,41 +5774,6 @@
         </p:nvSpPr>
         <p:spPr>
           <a:xfrm>
-            <a:off x="2194560" y="6446520"/>
-            <a:ext cx="5943600" cy="274320"/>
-          </a:xfrm>
-          <a:prstGeom prst="rect">
-            <a:avLst/>
-          </a:prstGeom>
-          <a:noFill/>
-        </p:spPr>
-        <p:txBody>
-          <a:bodyPr wrap="square" anchor="t" lIns="0" rIns="0" tIns="0" bIns="0">
-            <a:spAutoFit/>
-          </a:bodyPr>
-          <a:lstStyle/>
-          <a:p>
-            <a:pPr algn="l"/>
-            <a:r>
-              <a:rPr sz="1000" b="1" i="0">
-                <a:solidFill>
-                  <a:srgbClr val="8F989D"/>
-                </a:solidFill>
-                <a:latin typeface="Calibri"/>
-              </a:rPr>
-              <a:t>Inicio 8:10 pm</a:t>
-            </a:r>
-          </a:p>
-        </p:txBody>
-      </p:sp>
-      <p:sp>
-        <p:nvSpPr>
-          <p:cNvPr id="6" name="TextBox 5"/>
-          <p:cNvSpPr txBox="1"/>
-          <p:nvPr/>
-        </p:nvSpPr>
-        <p:spPr>
-          <a:xfrm>
             <a:off x="11094415" y="6446520"/>
             <a:ext cx="548640" cy="274320"/>
           </a:xfrm>
@@ -6013,7 +5803,7 @@
       </p:sp>
       <p:sp>
         <p:nvSpPr>
-          <p:cNvPr id="7" name="TextBox 6"/>
+          <p:cNvPr id="6" name="TextBox 5"/>
           <p:cNvSpPr txBox="1"/>
           <p:nvPr/>
         </p:nvSpPr>
@@ -6435,41 +6225,6 @@
         </p:nvSpPr>
         <p:spPr>
           <a:xfrm>
-            <a:off x="2194560" y="6446520"/>
-            <a:ext cx="5943600" cy="274320"/>
-          </a:xfrm>
-          <a:prstGeom prst="rect">
-            <a:avLst/>
-          </a:prstGeom>
-          <a:noFill/>
-        </p:spPr>
-        <p:txBody>
-          <a:bodyPr wrap="square" anchor="t" lIns="0" rIns="0" tIns="0" bIns="0">
-            <a:spAutoFit/>
-          </a:bodyPr>
-          <a:lstStyle/>
-          <a:p>
-            <a:pPr algn="l"/>
-            <a:r>
-              <a:rPr sz="1000" b="1" i="0">
-                <a:solidFill>
-                  <a:srgbClr val="8F989D"/>
-                </a:solidFill>
-                <a:latin typeface="Calibri"/>
-              </a:rPr>
-              <a:t>Inicio 8:10 pm</a:t>
-            </a:r>
-          </a:p>
-        </p:txBody>
-      </p:sp>
-      <p:sp>
-        <p:nvSpPr>
-          <p:cNvPr id="6" name="TextBox 5"/>
-          <p:cNvSpPr txBox="1"/>
-          <p:nvPr/>
-        </p:nvSpPr>
-        <p:spPr>
-          <a:xfrm>
             <a:off x="11094415" y="6446520"/>
             <a:ext cx="548640" cy="274320"/>
           </a:xfrm>
@@ -6499,7 +6254,7 @@
       </p:sp>
       <p:sp>
         <p:nvSpPr>
-          <p:cNvPr id="7" name="TextBox 6"/>
+          <p:cNvPr id="6" name="TextBox 5"/>
           <p:cNvSpPr txBox="1"/>
           <p:nvPr/>
         </p:nvSpPr>
@@ -7344,41 +7099,6 @@
         </p:nvSpPr>
         <p:spPr>
           <a:xfrm>
-            <a:off x="2194560" y="6446520"/>
-            <a:ext cx="5943600" cy="274320"/>
-          </a:xfrm>
-          <a:prstGeom prst="rect">
-            <a:avLst/>
-          </a:prstGeom>
-          <a:noFill/>
-        </p:spPr>
-        <p:txBody>
-          <a:bodyPr wrap="square" anchor="t" lIns="0" rIns="0" tIns="0" bIns="0">
-            <a:spAutoFit/>
-          </a:bodyPr>
-          <a:lstStyle/>
-          <a:p>
-            <a:pPr algn="l"/>
-            <a:r>
-              <a:rPr sz="1000" b="1" i="0">
-                <a:solidFill>
-                  <a:srgbClr val="8F989D"/>
-                </a:solidFill>
-                <a:latin typeface="Calibri"/>
-              </a:rPr>
-              <a:t>Inicio 8:10 pm</a:t>
-            </a:r>
-          </a:p>
-        </p:txBody>
-      </p:sp>
-      <p:sp>
-        <p:nvSpPr>
-          <p:cNvPr id="7" name="TextBox 6"/>
-          <p:cNvSpPr txBox="1"/>
-          <p:nvPr/>
-        </p:nvSpPr>
-        <p:spPr>
-          <a:xfrm>
             <a:off x="11094415" y="6446520"/>
             <a:ext cx="548640" cy="274320"/>
           </a:xfrm>
@@ -7796,41 +7516,6 @@
         </p:nvSpPr>
         <p:spPr>
           <a:xfrm>
-            <a:off x="2194560" y="6446520"/>
-            <a:ext cx="5943600" cy="274320"/>
-          </a:xfrm>
-          <a:prstGeom prst="rect">
-            <a:avLst/>
-          </a:prstGeom>
-          <a:noFill/>
-        </p:spPr>
-        <p:txBody>
-          <a:bodyPr wrap="square" anchor="t" lIns="0" rIns="0" tIns="0" bIns="0">
-            <a:spAutoFit/>
-          </a:bodyPr>
-          <a:lstStyle/>
-          <a:p>
-            <a:pPr algn="l"/>
-            <a:r>
-              <a:rPr sz="1000" b="1" i="0">
-                <a:solidFill>
-                  <a:srgbClr val="8F989D"/>
-                </a:solidFill>
-                <a:latin typeface="Calibri"/>
-              </a:rPr>
-              <a:t>Inicio 8:10 pm</a:t>
-            </a:r>
-          </a:p>
-        </p:txBody>
-      </p:sp>
-      <p:sp>
-        <p:nvSpPr>
-          <p:cNvPr id="6" name="TextBox 5"/>
-          <p:cNvSpPr txBox="1"/>
-          <p:nvPr/>
-        </p:nvSpPr>
-        <p:spPr>
-          <a:xfrm>
             <a:off x="11094415" y="6446520"/>
             <a:ext cx="548640" cy="274320"/>
           </a:xfrm>
@@ -7860,7 +7545,7 @@
       </p:sp>
       <p:sp>
         <p:nvSpPr>
-          <p:cNvPr id="7" name="TextBox 6"/>
+          <p:cNvPr id="6" name="TextBox 5"/>
           <p:cNvSpPr txBox="1"/>
           <p:nvPr/>
         </p:nvSpPr>
@@ -8111,41 +7796,6 @@
           </a:p>
         </p:txBody>
       </p:sp>
-      <p:sp>
-        <p:nvSpPr>
-          <p:cNvPr id="7" name="TextBox 6"/>
-          <p:cNvSpPr txBox="1"/>
-          <p:nvPr/>
-        </p:nvSpPr>
-        <p:spPr>
-          <a:xfrm>
-            <a:off x="2194560" y="6446520"/>
-            <a:ext cx="5943600" cy="274320"/>
-          </a:xfrm>
-          <a:prstGeom prst="rect">
-            <a:avLst/>
-          </a:prstGeom>
-          <a:noFill/>
-        </p:spPr>
-        <p:txBody>
-          <a:bodyPr wrap="square" anchor="t" lIns="0" rIns="0" tIns="0" bIns="0">
-            <a:spAutoFit/>
-          </a:bodyPr>
-          <a:lstStyle/>
-          <a:p>
-            <a:pPr algn="l"/>
-            <a:r>
-              <a:rPr sz="1000" b="1" i="0">
-                <a:solidFill>
-                  <a:srgbClr val="8F989D"/>
-                </a:solidFill>
-                <a:latin typeface="Calibri"/>
-              </a:rPr>
-              <a:t>Inicio 8:10 pm</a:t>
-            </a:r>
-          </a:p>
-        </p:txBody>
-      </p:sp>
     </p:spTree>
   </p:cSld>
   <p:clrMapOvr>
@@ -8502,41 +8152,6 @@
         </p:nvSpPr>
         <p:spPr>
           <a:xfrm>
-            <a:off x="2194560" y="6446520"/>
-            <a:ext cx="5943600" cy="274320"/>
-          </a:xfrm>
-          <a:prstGeom prst="rect">
-            <a:avLst/>
-          </a:prstGeom>
-          <a:noFill/>
-        </p:spPr>
-        <p:txBody>
-          <a:bodyPr wrap="square" anchor="t" lIns="0" rIns="0" tIns="0" bIns="0">
-            <a:spAutoFit/>
-          </a:bodyPr>
-          <a:lstStyle/>
-          <a:p>
-            <a:pPr algn="l"/>
-            <a:r>
-              <a:rPr sz="1000" b="1" i="0">
-                <a:solidFill>
-                  <a:srgbClr val="8F989D"/>
-                </a:solidFill>
-                <a:latin typeface="Calibri"/>
-              </a:rPr>
-              <a:t>Inicio 8:10 pm</a:t>
-            </a:r>
-          </a:p>
-        </p:txBody>
-      </p:sp>
-      <p:sp>
-        <p:nvSpPr>
-          <p:cNvPr id="6" name="TextBox 5"/>
-          <p:cNvSpPr txBox="1"/>
-          <p:nvPr/>
-        </p:nvSpPr>
-        <p:spPr>
-          <a:xfrm>
             <a:off x="11094415" y="6446520"/>
             <a:ext cx="548640" cy="274320"/>
           </a:xfrm>
@@ -8566,7 +8181,7 @@
       </p:sp>
       <p:sp>
         <p:nvSpPr>
-          <p:cNvPr id="7" name="TextBox 6"/>
+          <p:cNvPr id="6" name="TextBox 5"/>
           <p:cNvSpPr txBox="1"/>
           <p:nvPr/>
         </p:nvSpPr>
@@ -8972,41 +8587,6 @@
         </p:nvSpPr>
         <p:spPr>
           <a:xfrm>
-            <a:off x="2194560" y="6446520"/>
-            <a:ext cx="5943600" cy="274320"/>
-          </a:xfrm>
-          <a:prstGeom prst="rect">
-            <a:avLst/>
-          </a:prstGeom>
-          <a:noFill/>
-        </p:spPr>
-        <p:txBody>
-          <a:bodyPr wrap="square" anchor="t" lIns="0" rIns="0" tIns="0" bIns="0">
-            <a:spAutoFit/>
-          </a:bodyPr>
-          <a:lstStyle/>
-          <a:p>
-            <a:pPr algn="l"/>
-            <a:r>
-              <a:rPr sz="1000" b="1" i="0">
-                <a:solidFill>
-                  <a:srgbClr val="8F989D"/>
-                </a:solidFill>
-                <a:latin typeface="Calibri"/>
-              </a:rPr>
-              <a:t>Inicio 8:10 pm</a:t>
-            </a:r>
-          </a:p>
-        </p:txBody>
-      </p:sp>
-      <p:sp>
-        <p:nvSpPr>
-          <p:cNvPr id="6" name="TextBox 5"/>
-          <p:cNvSpPr txBox="1"/>
-          <p:nvPr/>
-        </p:nvSpPr>
-        <p:spPr>
-          <a:xfrm>
             <a:off x="11094415" y="6446520"/>
             <a:ext cx="548640" cy="274320"/>
           </a:xfrm>
@@ -9036,7 +8616,7 @@
       </p:sp>
       <p:sp>
         <p:nvSpPr>
-          <p:cNvPr id="7" name="TextBox 6"/>
+          <p:cNvPr id="6" name="TextBox 5"/>
           <p:cNvSpPr txBox="1"/>
           <p:nvPr/>
         </p:nvSpPr>
@@ -9743,41 +9323,6 @@
       <p:sp>
         <p:nvSpPr>
           <p:cNvPr id="6" name="TextBox 5"/>
-          <p:cNvSpPr txBox="1"/>
-          <p:nvPr/>
-        </p:nvSpPr>
-        <p:spPr>
-          <a:xfrm>
-            <a:off x="2194560" y="6446520"/>
-            <a:ext cx="5943600" cy="274320"/>
-          </a:xfrm>
-          <a:prstGeom prst="rect">
-            <a:avLst/>
-          </a:prstGeom>
-          <a:noFill/>
-        </p:spPr>
-        <p:txBody>
-          <a:bodyPr wrap="square" anchor="t" lIns="0" rIns="0" tIns="0" bIns="0">
-            <a:spAutoFit/>
-          </a:bodyPr>
-          <a:lstStyle/>
-          <a:p>
-            <a:pPr algn="l"/>
-            <a:r>
-              <a:rPr sz="1000" b="1" i="0">
-                <a:solidFill>
-                  <a:srgbClr val="8F989D"/>
-                </a:solidFill>
-                <a:latin typeface="Calibri"/>
-              </a:rPr>
-              <a:t>Inicio 8:10 pm</a:t>
-            </a:r>
-          </a:p>
-        </p:txBody>
-      </p:sp>
-      <p:sp>
-        <p:nvSpPr>
-          <p:cNvPr id="7" name="TextBox 6"/>
           <p:cNvSpPr txBox="1"/>
           <p:nvPr/>
         </p:nvSpPr>
@@ -10553,41 +10098,6 @@
         </p:nvSpPr>
         <p:spPr>
           <a:xfrm>
-            <a:off x="2194560" y="6446520"/>
-            <a:ext cx="5943600" cy="274320"/>
-          </a:xfrm>
-          <a:prstGeom prst="rect">
-            <a:avLst/>
-          </a:prstGeom>
-          <a:noFill/>
-        </p:spPr>
-        <p:txBody>
-          <a:bodyPr wrap="square" anchor="t" lIns="0" rIns="0" tIns="0" bIns="0">
-            <a:spAutoFit/>
-          </a:bodyPr>
-          <a:lstStyle/>
-          <a:p>
-            <a:pPr algn="l"/>
-            <a:r>
-              <a:rPr sz="1000" b="1" i="0">
-                <a:solidFill>
-                  <a:srgbClr val="8F989D"/>
-                </a:solidFill>
-                <a:latin typeface="Calibri"/>
-              </a:rPr>
-              <a:t>Inicio 8:10 pm</a:t>
-            </a:r>
-          </a:p>
-        </p:txBody>
-      </p:sp>
-      <p:sp>
-        <p:nvSpPr>
-          <p:cNvPr id="7" name="TextBox 6"/>
-          <p:cNvSpPr txBox="1"/>
-          <p:nvPr/>
-        </p:nvSpPr>
-        <p:spPr>
-          <a:xfrm>
             <a:off x="11094415" y="6446520"/>
             <a:ext cx="548640" cy="274320"/>
           </a:xfrm>
@@ -10969,41 +10479,6 @@
         </p:nvSpPr>
         <p:spPr>
           <a:xfrm>
-            <a:off x="2194560" y="6446520"/>
-            <a:ext cx="5943600" cy="274320"/>
-          </a:xfrm>
-          <a:prstGeom prst="rect">
-            <a:avLst/>
-          </a:prstGeom>
-          <a:noFill/>
-        </p:spPr>
-        <p:txBody>
-          <a:bodyPr wrap="square" anchor="t" lIns="0" rIns="0" tIns="0" bIns="0">
-            <a:spAutoFit/>
-          </a:bodyPr>
-          <a:lstStyle/>
-          <a:p>
-            <a:pPr algn="l"/>
-            <a:r>
-              <a:rPr sz="1000" b="1" i="0">
-                <a:solidFill>
-                  <a:srgbClr val="8F989D"/>
-                </a:solidFill>
-                <a:latin typeface="Calibri"/>
-              </a:rPr>
-              <a:t>Inicio 8:10 pm</a:t>
-            </a:r>
-          </a:p>
-        </p:txBody>
-      </p:sp>
-      <p:sp>
-        <p:nvSpPr>
-          <p:cNvPr id="6" name="TextBox 5"/>
-          <p:cNvSpPr txBox="1"/>
-          <p:nvPr/>
-        </p:nvSpPr>
-        <p:spPr>
-          <a:xfrm>
             <a:off x="11094415" y="6446520"/>
             <a:ext cx="548640" cy="274320"/>
           </a:xfrm>
@@ -11033,7 +10508,7 @@
       </p:sp>
       <p:sp>
         <p:nvSpPr>
-          <p:cNvPr id="7" name="TextBox 6"/>
+          <p:cNvPr id="6" name="TextBox 5"/>
           <p:cNvSpPr txBox="1"/>
           <p:nvPr/>
         </p:nvSpPr>
@@ -11466,41 +10941,6 @@
         </p:nvSpPr>
         <p:spPr>
           <a:xfrm>
-            <a:off x="2194560" y="6446520"/>
-            <a:ext cx="5943600" cy="274320"/>
-          </a:xfrm>
-          <a:prstGeom prst="rect">
-            <a:avLst/>
-          </a:prstGeom>
-          <a:noFill/>
-        </p:spPr>
-        <p:txBody>
-          <a:bodyPr wrap="square" anchor="t" lIns="0" rIns="0" tIns="0" bIns="0">
-            <a:spAutoFit/>
-          </a:bodyPr>
-          <a:lstStyle/>
-          <a:p>
-            <a:pPr algn="l"/>
-            <a:r>
-              <a:rPr sz="1000" b="1" i="0">
-                <a:solidFill>
-                  <a:srgbClr val="8F989D"/>
-                </a:solidFill>
-                <a:latin typeface="Calibri"/>
-              </a:rPr>
-              <a:t>Inicio 8:10 pm</a:t>
-            </a:r>
-          </a:p>
-        </p:txBody>
-      </p:sp>
-      <p:sp>
-        <p:nvSpPr>
-          <p:cNvPr id="6" name="TextBox 5"/>
-          <p:cNvSpPr txBox="1"/>
-          <p:nvPr/>
-        </p:nvSpPr>
-        <p:spPr>
-          <a:xfrm>
             <a:off x="11094415" y="6446520"/>
             <a:ext cx="548640" cy="274320"/>
           </a:xfrm>
@@ -11530,7 +10970,7 @@
       </p:sp>
       <p:sp>
         <p:nvSpPr>
-          <p:cNvPr id="7" name="TextBox 6"/>
+          <p:cNvPr id="6" name="TextBox 5"/>
           <p:cNvSpPr txBox="1"/>
           <p:nvPr/>
         </p:nvSpPr>
@@ -12041,41 +11481,6 @@
         </p:nvSpPr>
         <p:spPr>
           <a:xfrm>
-            <a:off x="2194560" y="6446520"/>
-            <a:ext cx="5943600" cy="274320"/>
-          </a:xfrm>
-          <a:prstGeom prst="rect">
-            <a:avLst/>
-          </a:prstGeom>
-          <a:noFill/>
-        </p:spPr>
-        <p:txBody>
-          <a:bodyPr wrap="square" anchor="t" lIns="0" rIns="0" tIns="0" bIns="0">
-            <a:spAutoFit/>
-          </a:bodyPr>
-          <a:lstStyle/>
-          <a:p>
-            <a:pPr algn="l"/>
-            <a:r>
-              <a:rPr sz="1000" b="1" i="0">
-                <a:solidFill>
-                  <a:srgbClr val="8F989D"/>
-                </a:solidFill>
-                <a:latin typeface="Calibri"/>
-              </a:rPr>
-              <a:t>Inicio 8:10 pm</a:t>
-            </a:r>
-          </a:p>
-        </p:txBody>
-      </p:sp>
-      <p:sp>
-        <p:nvSpPr>
-          <p:cNvPr id="7" name="TextBox 6"/>
-          <p:cNvSpPr txBox="1"/>
-          <p:nvPr/>
-        </p:nvSpPr>
-        <p:spPr>
-          <a:xfrm>
             <a:off x="11094415" y="6446520"/>
             <a:ext cx="548640" cy="274320"/>
           </a:xfrm>
@@ -12466,41 +11871,6 @@
         </p:nvSpPr>
         <p:spPr>
           <a:xfrm>
-            <a:off x="2194560" y="6446520"/>
-            <a:ext cx="5943600" cy="274320"/>
-          </a:xfrm>
-          <a:prstGeom prst="rect">
-            <a:avLst/>
-          </a:prstGeom>
-          <a:noFill/>
-        </p:spPr>
-        <p:txBody>
-          <a:bodyPr wrap="square" anchor="t" lIns="0" rIns="0" tIns="0" bIns="0">
-            <a:spAutoFit/>
-          </a:bodyPr>
-          <a:lstStyle/>
-          <a:p>
-            <a:pPr algn="l"/>
-            <a:r>
-              <a:rPr sz="1000" b="1" i="0">
-                <a:solidFill>
-                  <a:srgbClr val="8F989D"/>
-                </a:solidFill>
-                <a:latin typeface="Calibri"/>
-              </a:rPr>
-              <a:t>Inicio 8:10 pm</a:t>
-            </a:r>
-          </a:p>
-        </p:txBody>
-      </p:sp>
-      <p:sp>
-        <p:nvSpPr>
-          <p:cNvPr id="6" name="TextBox 5"/>
-          <p:cNvSpPr txBox="1"/>
-          <p:nvPr/>
-        </p:nvSpPr>
-        <p:spPr>
-          <a:xfrm>
             <a:off x="11094415" y="6446520"/>
             <a:ext cx="548640" cy="274320"/>
           </a:xfrm>
@@ -12530,7 +11900,7 @@
       </p:sp>
       <p:sp>
         <p:nvSpPr>
-          <p:cNvPr id="7" name="TextBox 6"/>
+          <p:cNvPr id="6" name="TextBox 5"/>
           <p:cNvSpPr txBox="1"/>
           <p:nvPr/>
         </p:nvSpPr>

--- a/Especializacion/Proyecto I/Clases/Sesion 03 - Objetivos, justificación, alcances y limitaciones/Presentacion.pptx
+++ b/Especializacion/Proyecto I/Clases/Sesion 03 - Objetivos, justificación, alcances y limitaciones/Presentacion.pptx
@@ -23,6 +23,8 @@
     <p:sldId id="271" r:id="rId22"/>
     <p:sldId id="272" r:id="rId23"/>
     <p:sldId id="273" r:id="rId24"/>
+    <p:sldId id="274" r:id="rId25"/>
+    <p:sldId id="275" r:id="rId26"/>
   </p:sldIdLst>
   <p:sldSz cx="12191695" cy="6858000" type="screen4x3"/>
   <p:notesSz cx="6858000" cy="9144000"/>
@@ -5848,7 +5850,7 @@
                 </a:solidFill>
                 <a:latin typeface="Calibri"/>
               </a:rPr>
-              <a:t>: no abran un archivo nuevo; sigan escribiendo debajo de lo de la sesión anterior. [URL CDigital — campus del curso pendiente]</a:t>
+              <a:t>: no abran un archivo nuevo; sigan escribiendo debajo de lo de la sesión anterior. https://cdigital.cun.edu.co/course/view.php?id=130378</a:t>
             </a:r>
           </a:p>
         </p:txBody>
@@ -5953,7 +5955,7 @@
                 </a:solidFill>
                 <a:latin typeface="Calibri"/>
               </a:rPr>
-              <a:t>TALLER (20 minutos) — redacción del bloque de formulación</a:t>
+              <a:t>TALLER · Redacción del bloque de formulación</a:t>
             </a:r>
           </a:p>
         </p:txBody>
@@ -5966,8 +5968,8 @@
         </p:nvSpPr>
         <p:spPr>
           <a:xfrm>
-            <a:off x="640080" y="1691639"/>
-            <a:ext cx="10911535" cy="4617720"/>
+            <a:off x="640080" y="1280160"/>
+            <a:ext cx="10911535" cy="411480"/>
           </a:xfrm>
           <a:prstGeom prst="rect">
             <a:avLst/>
@@ -5980,6 +5982,41 @@
           </a:bodyPr>
           <a:lstStyle/>
           <a:p>
+            <a:pPr algn="ctr"/>
+            <a:r>
+              <a:rPr sz="1500" b="0" i="0">
+                <a:solidFill>
+                  <a:srgbClr val="2B2B2B"/>
+                </a:solidFill>
+                <a:latin typeface="Calibri"/>
+              </a:rPr>
+              <a:t>Por equipos · el Docente circula, con prioridad para quienes no pasen del específico 1</a:t>
+            </a:r>
+          </a:p>
+        </p:txBody>
+      </p:sp>
+      <p:sp>
+        <p:nvSpPr>
+          <p:cNvPr id="5" name="TextBox 4"/>
+          <p:cNvSpPr txBox="1"/>
+          <p:nvPr/>
+        </p:nvSpPr>
+        <p:spPr>
+          <a:xfrm>
+            <a:off x="640080" y="2011679"/>
+            <a:ext cx="10911535" cy="4297680"/>
+          </a:xfrm>
+          <a:prstGeom prst="rect">
+            <a:avLst/>
+          </a:prstGeom>
+          <a:noFill/>
+        </p:spPr>
+        <p:txBody>
+          <a:bodyPr wrap="square" anchor="t" lIns="0" rIns="0" tIns="0" bIns="0">
+            <a:spAutoFit/>
+          </a:bodyPr>
+          <a:lstStyle/>
+          <a:p>
             <a:pPr>
               <a:spcAft>
                 <a:spcPts val="1000"/>
@@ -6001,7 +6038,7 @@
                 </a:solidFill>
                 <a:latin typeface="Calibri"/>
               </a:rPr>
-              <a:t>Consigna literal:</a:t>
+              <a:t>Al final tiene:</a:t>
             </a:r>
             <a:r>
               <a:rPr sz="1600" b="0" i="0">
@@ -6010,143 +6047,7 @@
                 </a:solidFill>
                 <a:latin typeface="Calibri"/>
               </a:rPr>
-              <a:t> 20 minutos en el documento del equipo. Cuatro productos.</a:t>
-            </a:r>
-          </a:p>
-          <a:p>
-            <a:pPr lvl="1">
-              <a:spcAft>
-                <a:spcPts val="600"/>
-              </a:spcAft>
-            </a:pPr>
-            <a:r>
-              <a:rPr sz="1500" b="0" i="0">
-                <a:solidFill>
-                  <a:srgbClr val="2B2B2B"/>
-                </a:solidFill>
-                <a:latin typeface="Calibri"/>
-              </a:rPr>
-              <a:t>●   </a:t>
-            </a:r>
-            <a:r>
-              <a:rPr sz="1500" b="1" i="0">
-                <a:solidFill>
-                  <a:srgbClr val="2B2B2B"/>
-                </a:solidFill>
-                <a:latin typeface="Calibri"/>
-              </a:rPr>
-              <a:t>(1)</a:t>
-            </a:r>
-            <a:r>
-              <a:rPr sz="1500" b="0" i="0">
-                <a:solidFill>
-                  <a:srgbClr val="2B2B2B"/>
-                </a:solidFill>
-                <a:latin typeface="Calibri"/>
-              </a:rPr>
-              <a:t> Objetivo general con la fórmula verbo + qué + dónde + para qué.</a:t>
-            </a:r>
-          </a:p>
-          <a:p>
-            <a:pPr lvl="1">
-              <a:spcAft>
-                <a:spcPts val="600"/>
-              </a:spcAft>
-            </a:pPr>
-            <a:r>
-              <a:rPr sz="1500" b="0" i="0">
-                <a:solidFill>
-                  <a:srgbClr val="2B2B2B"/>
-                </a:solidFill>
-                <a:latin typeface="Calibri"/>
-              </a:rPr>
-              <a:t>●   </a:t>
-            </a:r>
-            <a:r>
-              <a:rPr sz="1500" b="1" i="0">
-                <a:solidFill>
-                  <a:srgbClr val="2B2B2B"/>
-                </a:solidFill>
-                <a:latin typeface="Calibri"/>
-              </a:rPr>
-              <a:t>(2)</a:t>
-            </a:r>
-            <a:r>
-              <a:rPr sz="1500" b="0" i="0">
-                <a:solidFill>
-                  <a:srgbClr val="2B2B2B"/>
-                </a:solidFill>
-                <a:latin typeface="Calibri"/>
-              </a:rPr>
-              <a:t> Tres específicos numerados, un verbo cada uno, en el orden describir → fundamentar → proponer.</a:t>
-            </a:r>
-          </a:p>
-          <a:p>
-            <a:pPr lvl="1">
-              <a:spcAft>
-                <a:spcPts val="600"/>
-              </a:spcAft>
-            </a:pPr>
-            <a:r>
-              <a:rPr sz="1500" b="0" i="0">
-                <a:solidFill>
-                  <a:srgbClr val="2B2B2B"/>
-                </a:solidFill>
-                <a:latin typeface="Calibri"/>
-              </a:rPr>
-              <a:t>●   </a:t>
-            </a:r>
-            <a:r>
-              <a:rPr sz="1500" b="1" i="0">
-                <a:solidFill>
-                  <a:srgbClr val="2B2B2B"/>
-                </a:solidFill>
-                <a:latin typeface="Calibri"/>
-              </a:rPr>
-              <a:t>(3)</a:t>
-            </a:r>
-            <a:r>
-              <a:rPr sz="1500" b="0" i="0">
-                <a:solidFill>
-                  <a:srgbClr val="2B2B2B"/>
-                </a:solidFill>
-                <a:latin typeface="Calibri"/>
-              </a:rPr>
-              <a:t> De media a una página de justificación: tres párrafos, un pilar por párrafo.</a:t>
-            </a:r>
-          </a:p>
-          <a:p>
-            <a:pPr lvl="1">
-              <a:spcAft>
-                <a:spcPts val="600"/>
-              </a:spcAft>
-            </a:pPr>
-            <a:r>
-              <a:rPr sz="1500" b="0" i="0">
-                <a:solidFill>
-                  <a:srgbClr val="2B2B2B"/>
-                </a:solidFill>
-                <a:latin typeface="Calibri"/>
-              </a:rPr>
-              <a:t>●   </a:t>
-            </a:r>
-            <a:r>
-              <a:rPr sz="1500" b="1" i="0">
-                <a:solidFill>
-                  <a:srgbClr val="2B2B2B"/>
-                </a:solidFill>
-                <a:latin typeface="Calibri"/>
-              </a:rPr>
-              <a:t>(4)</a:t>
-            </a:r>
-            <a:r>
-              <a:rPr sz="1500" b="0" i="0">
-                <a:solidFill>
-                  <a:srgbClr val="2B2B2B"/>
-                </a:solidFill>
-                <a:latin typeface="Calibri"/>
-              </a:rPr>
-              <a:t> Alcances y limitaciones en dos listas de viñetas separadas.</a:t>
+              <a:t> objetivo general, tres específicos, la justificación y los alcances y limitaciones.</a:t>
             </a:r>
           </a:p>
           <a:p>
@@ -6162,7 +6063,43 @@
                 </a:solidFill>
                 <a:latin typeface="Calibri"/>
               </a:rPr>
-              <a:t>–   El Docente circula por los equipos; prioridad para quienes no logren pasar del específico 1.</a:t>
+              <a:t>–   </a:t>
+            </a:r>
+            <a:r>
+              <a:rPr sz="1600" b="1" i="0">
+                <a:solidFill>
+                  <a:srgbClr val="2B2B2B"/>
+                </a:solidFill>
+                <a:latin typeface="Calibri"/>
+              </a:rPr>
+              <a:t>Paso 1</a:t>
+            </a:r>
+            <a:r>
+              <a:rPr sz="1600" b="0" i="0">
+                <a:solidFill>
+                  <a:srgbClr val="2B2B2B"/>
+                </a:solidFill>
+                <a:latin typeface="Calibri"/>
+              </a:rPr>
+              <a:t> · </a:t>
+            </a:r>
+            <a:r>
+              <a:rPr sz="1600" b="1" i="0">
+                <a:solidFill>
+                  <a:srgbClr val="2B2B2B"/>
+                </a:solidFill>
+                <a:latin typeface="Calibri"/>
+              </a:rPr>
+              <a:t>Objetivo general</a:t>
+            </a:r>
+            <a:r>
+              <a:rPr sz="1600" b="0" i="0">
+                <a:solidFill>
+                  <a:srgbClr val="2B2B2B"/>
+                </a:solidFill>
+                <a:latin typeface="Calibri"/>
+              </a:rPr>
+              <a:t> con la fórmula verbo + qué + dónde + para qué.</a:t>
             </a:r>
           </a:p>
           <a:p>
@@ -6187,7 +6124,7 @@
                 </a:solidFill>
                 <a:latin typeface="Calibri"/>
               </a:rPr>
-              <a:t>Criterio de éxito (verificable):</a:t>
+              <a:t>Paso 2</a:t>
             </a:r>
             <a:r>
               <a:rPr sz="1600" b="0" i="0">
@@ -6196,30 +6133,188 @@
                 </a:solidFill>
                 <a:latin typeface="Calibri"/>
               </a:rPr>
-              <a:t> cada específico se puede “tachar” el día que se cumpla, y el general suena igual que la pregunta en afirmativo.</a:t>
-            </a:r>
-          </a:p>
-          <a:p>
-            <a:pPr lvl="1">
+              <a:t> · </a:t>
+            </a:r>
+            <a:r>
+              <a:rPr sz="1600" b="1" i="0">
+                <a:solidFill>
+                  <a:srgbClr val="2B2B2B"/>
+                </a:solidFill>
+                <a:latin typeface="Calibri"/>
+              </a:rPr>
+              <a:t>Tres específicos</a:t>
+            </a:r>
+            <a:r>
+              <a:rPr sz="1600" b="0" i="0">
+                <a:solidFill>
+                  <a:srgbClr val="2B2B2B"/>
+                </a:solidFill>
+                <a:latin typeface="Calibri"/>
+              </a:rPr>
+              <a:t> numerados, un verbo cada uno, en el orden describir → fundamentar → proponer.</a:t>
+            </a:r>
+          </a:p>
+          <a:p>
+            <a:pPr>
               <a:spcAft>
-                <a:spcPts val="600"/>
+                <a:spcPts val="1000"/>
               </a:spcAft>
             </a:pPr>
             <a:r>
-              <a:rPr sz="1500" b="0" i="0">
-                <a:solidFill>
-                  <a:srgbClr val="2B2B2B"/>
-                </a:solidFill>
-                <a:latin typeface="Calibri"/>
-              </a:rPr>
-              <a:t>●   Prueba final: tache mentalmente los tres específicos. ¿Ya quedó cumplido el general? Si no, falta uno.</a:t>
-            </a:r>
-          </a:p>
-        </p:txBody>
-      </p:sp>
-      <p:sp>
-        <p:nvSpPr>
-          <p:cNvPr id="5" name="TextBox 4"/>
+              <a:rPr sz="1600" b="0" i="0">
+                <a:solidFill>
+                  <a:srgbClr val="2B2B2B"/>
+                </a:solidFill>
+                <a:latin typeface="Calibri"/>
+              </a:rPr>
+              <a:t>–   </a:t>
+            </a:r>
+            <a:r>
+              <a:rPr sz="1600" b="1" i="0">
+                <a:solidFill>
+                  <a:srgbClr val="2B2B2B"/>
+                </a:solidFill>
+                <a:latin typeface="Calibri"/>
+              </a:rPr>
+              <a:t>Paso 3</a:t>
+            </a:r>
+            <a:r>
+              <a:rPr sz="1600" b="0" i="0">
+                <a:solidFill>
+                  <a:srgbClr val="2B2B2B"/>
+                </a:solidFill>
+                <a:latin typeface="Calibri"/>
+              </a:rPr>
+              <a:t> · </a:t>
+            </a:r>
+            <a:r>
+              <a:rPr sz="1600" b="1" i="0">
+                <a:solidFill>
+                  <a:srgbClr val="2B2B2B"/>
+                </a:solidFill>
+                <a:latin typeface="Calibri"/>
+              </a:rPr>
+              <a:t>De media a una página de justificación:</a:t>
+            </a:r>
+            <a:r>
+              <a:rPr sz="1600" b="0" i="0">
+                <a:solidFill>
+                  <a:srgbClr val="2B2B2B"/>
+                </a:solidFill>
+                <a:latin typeface="Calibri"/>
+              </a:rPr>
+              <a:t> tres párrafos, un pilar por párrafo.</a:t>
+            </a:r>
+          </a:p>
+          <a:p>
+            <a:pPr>
+              <a:spcAft>
+                <a:spcPts val="1000"/>
+              </a:spcAft>
+            </a:pPr>
+            <a:r>
+              <a:rPr sz="1600" b="0" i="0">
+                <a:solidFill>
+                  <a:srgbClr val="2B2B2B"/>
+                </a:solidFill>
+                <a:latin typeface="Calibri"/>
+              </a:rPr>
+              <a:t>–   </a:t>
+            </a:r>
+            <a:r>
+              <a:rPr sz="1600" b="1" i="0">
+                <a:solidFill>
+                  <a:srgbClr val="2B2B2B"/>
+                </a:solidFill>
+                <a:latin typeface="Calibri"/>
+              </a:rPr>
+              <a:t>Paso 4</a:t>
+            </a:r>
+            <a:r>
+              <a:rPr sz="1600" b="0" i="0">
+                <a:solidFill>
+                  <a:srgbClr val="2B2B2B"/>
+                </a:solidFill>
+                <a:latin typeface="Calibri"/>
+              </a:rPr>
+              <a:t> · </a:t>
+            </a:r>
+            <a:r>
+              <a:rPr sz="1600" b="1" i="0">
+                <a:solidFill>
+                  <a:srgbClr val="2B2B2B"/>
+                </a:solidFill>
+                <a:latin typeface="Calibri"/>
+              </a:rPr>
+              <a:t>Alcances y limitaciones</a:t>
+            </a:r>
+            <a:r>
+              <a:rPr sz="1600" b="0" i="0">
+                <a:solidFill>
+                  <a:srgbClr val="2B2B2B"/>
+                </a:solidFill>
+                <a:latin typeface="Calibri"/>
+              </a:rPr>
+              <a:t> en dos listas de viñetas separadas.</a:t>
+            </a:r>
+          </a:p>
+          <a:p>
+            <a:pPr>
+              <a:spcAft>
+                <a:spcPts val="1000"/>
+              </a:spcAft>
+            </a:pPr>
+            <a:r>
+              <a:rPr sz="1600" b="0" i="0">
+                <a:solidFill>
+                  <a:srgbClr val="2B2B2B"/>
+                </a:solidFill>
+                <a:latin typeface="Calibri"/>
+              </a:rPr>
+              <a:t>–   </a:t>
+            </a:r>
+            <a:r>
+              <a:rPr sz="1600" b="1" i="0">
+                <a:solidFill>
+                  <a:srgbClr val="2B2B2B"/>
+                </a:solidFill>
+                <a:latin typeface="Calibri"/>
+              </a:rPr>
+              <a:t>En clase, sin falta:</a:t>
+            </a:r>
+            <a:r>
+              <a:rPr sz="1600" b="0" i="0">
+                <a:solidFill>
+                  <a:srgbClr val="2B2B2B"/>
+                </a:solidFill>
+                <a:latin typeface="Calibri"/>
+              </a:rPr>
+              <a:t> los </a:t>
+            </a:r>
+            <a:r>
+              <a:rPr sz="1600" b="1" i="0">
+                <a:solidFill>
+                  <a:srgbClr val="2B2B2B"/>
+                </a:solidFill>
+                <a:latin typeface="Calibri"/>
+              </a:rPr>
+              <a:t>pasos 1 a 2</a:t>
+            </a:r>
+            <a:r>
+              <a:rPr sz="1600" b="0" i="0">
+                <a:solidFill>
+                  <a:srgbClr val="2B2B2B"/>
+                </a:solidFill>
+                <a:latin typeface="Calibri"/>
+              </a:rPr>
+              <a:t>. Del 3 en adelante puede quedar en trabajo autónomo, pero antes de la próxima sesión.</a:t>
+            </a:r>
+          </a:p>
+        </p:txBody>
+      </p:sp>
+      <p:sp>
+        <p:nvSpPr>
+          <p:cNvPr id="6" name="TextBox 5"/>
           <p:cNvSpPr txBox="1"/>
           <p:nvPr/>
         </p:nvSpPr>
@@ -6254,7 +6349,7 @@
       </p:sp>
       <p:sp>
         <p:nvSpPr>
-          <p:cNvPr id="6" name="TextBox 5"/>
+          <p:cNvPr id="7" name="TextBox 6"/>
           <p:cNvSpPr txBox="1"/>
           <p:nvPr/>
         </p:nvSpPr>
@@ -6386,6 +6481,550 @@
                 </a:solidFill>
                 <a:latin typeface="Calibri"/>
               </a:rPr>
+              <a:t>TALLER · cómo se revisa y dónde se entrega</a:t>
+            </a:r>
+          </a:p>
+        </p:txBody>
+      </p:sp>
+      <p:sp>
+        <p:nvSpPr>
+          <p:cNvPr id="4" name="TextBox 3"/>
+          <p:cNvSpPr txBox="1"/>
+          <p:nvPr/>
+        </p:nvSpPr>
+        <p:spPr>
+          <a:xfrm>
+            <a:off x="640080" y="1280160"/>
+            <a:ext cx="10911535" cy="411480"/>
+          </a:xfrm>
+          <a:prstGeom prst="rect">
+            <a:avLst/>
+          </a:prstGeom>
+          <a:noFill/>
+        </p:spPr>
+        <p:txBody>
+          <a:bodyPr wrap="square" anchor="t" lIns="0" rIns="0" tIns="0" bIns="0">
+            <a:spAutoFit/>
+          </a:bodyPr>
+          <a:lstStyle/>
+          <a:p>
+            <a:pPr algn="ctr"/>
+            <a:r>
+              <a:rPr sz="1500" b="0" i="0">
+                <a:solidFill>
+                  <a:srgbClr val="2B2B2B"/>
+                </a:solidFill>
+                <a:latin typeface="Calibri"/>
+              </a:rPr>
+              <a:t>Redacción del bloque de formulación</a:t>
+            </a:r>
+          </a:p>
+        </p:txBody>
+      </p:sp>
+      <p:sp>
+        <p:nvSpPr>
+          <p:cNvPr id="5" name="TextBox 4"/>
+          <p:cNvSpPr txBox="1"/>
+          <p:nvPr/>
+        </p:nvSpPr>
+        <p:spPr>
+          <a:xfrm>
+            <a:off x="640080" y="2011679"/>
+            <a:ext cx="10911535" cy="4297680"/>
+          </a:xfrm>
+          <a:prstGeom prst="rect">
+            <a:avLst/>
+          </a:prstGeom>
+          <a:noFill/>
+        </p:spPr>
+        <p:txBody>
+          <a:bodyPr wrap="square" anchor="t" lIns="0" rIns="0" tIns="0" bIns="0">
+            <a:spAutoFit/>
+          </a:bodyPr>
+          <a:lstStyle/>
+          <a:p>
+            <a:pPr>
+              <a:spcAft>
+                <a:spcPts val="1000"/>
+              </a:spcAft>
+            </a:pPr>
+            <a:r>
+              <a:rPr sz="1600" b="0" i="0">
+                <a:solidFill>
+                  <a:srgbClr val="2B2B2B"/>
+                </a:solidFill>
+                <a:latin typeface="Calibri"/>
+              </a:rPr>
+              <a:t>–   </a:t>
+            </a:r>
+            <a:r>
+              <a:rPr sz="1600" b="1" i="0">
+                <a:solidFill>
+                  <a:srgbClr val="2B2B2B"/>
+                </a:solidFill>
+                <a:latin typeface="Calibri"/>
+              </a:rPr>
+              <a:t>Quedó bien si</a:t>
+            </a:r>
+            <a:r>
+              <a:rPr sz="1600" b="0" i="0">
+                <a:solidFill>
+                  <a:srgbClr val="2B2B2B"/>
+                </a:solidFill>
+                <a:latin typeface="Calibri"/>
+              </a:rPr>
+              <a:t> —compruébelo usted antes de cerrar el documento—:</a:t>
+            </a:r>
+          </a:p>
+          <a:p>
+            <a:pPr lvl="1">
+              <a:spcAft>
+                <a:spcPts val="600"/>
+              </a:spcAft>
+            </a:pPr>
+            <a:r>
+              <a:rPr sz="1500" b="0" i="0">
+                <a:solidFill>
+                  <a:srgbClr val="2B2B2B"/>
+                </a:solidFill>
+                <a:latin typeface="Calibri"/>
+              </a:rPr>
+              <a:t>●   Cada específico se puede </a:t>
+            </a:r>
+            <a:r>
+              <a:rPr sz="1500" b="1" i="0">
+                <a:solidFill>
+                  <a:srgbClr val="2B2B2B"/>
+                </a:solidFill>
+                <a:latin typeface="Calibri"/>
+              </a:rPr>
+              <a:t>«tachar»</a:t>
+            </a:r>
+            <a:r>
+              <a:rPr sz="1500" b="0" i="0">
+                <a:solidFill>
+                  <a:srgbClr val="2B2B2B"/>
+                </a:solidFill>
+                <a:latin typeface="Calibri"/>
+              </a:rPr>
+              <a:t> el día que se cumpla.</a:t>
+            </a:r>
+          </a:p>
+          <a:p>
+            <a:pPr lvl="1">
+              <a:spcAft>
+                <a:spcPts val="600"/>
+              </a:spcAft>
+            </a:pPr>
+            <a:r>
+              <a:rPr sz="1500" b="0" i="0">
+                <a:solidFill>
+                  <a:srgbClr val="2B2B2B"/>
+                </a:solidFill>
+                <a:latin typeface="Calibri"/>
+              </a:rPr>
+              <a:t>●   El general suena igual que la pregunta, en afirmativo.</a:t>
+            </a:r>
+          </a:p>
+          <a:p>
+            <a:pPr lvl="1">
+              <a:spcAft>
+                <a:spcPts val="600"/>
+              </a:spcAft>
+            </a:pPr>
+            <a:r>
+              <a:rPr sz="1500" b="0" i="0">
+                <a:solidFill>
+                  <a:srgbClr val="2B2B2B"/>
+                </a:solidFill>
+                <a:latin typeface="Calibri"/>
+              </a:rPr>
+              <a:t>●   Tache mentalmente los tres específicos: ¿ya quedó cumplido el general? Si no, falta uno.</a:t>
+            </a:r>
+          </a:p>
+          <a:p>
+            <a:pPr>
+              <a:spcAft>
+                <a:spcPts val="1000"/>
+              </a:spcAft>
+            </a:pPr>
+            <a:r>
+              <a:rPr sz="1600" b="0" i="0">
+                <a:solidFill>
+                  <a:srgbClr val="2B2B2B"/>
+                </a:solidFill>
+                <a:latin typeface="Calibri"/>
+              </a:rPr>
+              <a:t>–   </a:t>
+            </a:r>
+            <a:r>
+              <a:rPr sz="1600" b="1" i="0">
+                <a:solidFill>
+                  <a:srgbClr val="2B2B2B"/>
+                </a:solidFill>
+                <a:latin typeface="Calibri"/>
+              </a:rPr>
+              <a:t>Plan B:</a:t>
+            </a:r>
+            <a:r>
+              <a:rPr sz="1600" b="0" i="0">
+                <a:solidFill>
+                  <a:srgbClr val="2B2B2B"/>
+                </a:solidFill>
+                <a:latin typeface="Calibri"/>
+              </a:rPr>
+              <a:t> Si no pasa del específico 1, no invente verbos: mire su pregunta y pregúntese qué hay que </a:t>
+            </a:r>
+            <a:r>
+              <a:rPr sz="1600" b="1" i="0">
+                <a:solidFill>
+                  <a:srgbClr val="2B2B2B"/>
+                </a:solidFill>
+                <a:latin typeface="Calibri"/>
+              </a:rPr>
+              <a:t>describir</a:t>
+            </a:r>
+            <a:r>
+              <a:rPr sz="1600" b="0" i="0">
+                <a:solidFill>
+                  <a:srgbClr val="2B2B2B"/>
+                </a:solidFill>
+                <a:latin typeface="Calibri"/>
+              </a:rPr>
+              <a:t> primero, qué hay que </a:t>
+            </a:r>
+            <a:r>
+              <a:rPr sz="1600" b="1" i="0">
+                <a:solidFill>
+                  <a:srgbClr val="2B2B2B"/>
+                </a:solidFill>
+                <a:latin typeface="Calibri"/>
+              </a:rPr>
+              <a:t>fundamentar</a:t>
+            </a:r>
+            <a:r>
+              <a:rPr sz="1600" b="0" i="0">
+                <a:solidFill>
+                  <a:srgbClr val="2B2B2B"/>
+                </a:solidFill>
+                <a:latin typeface="Calibri"/>
+              </a:rPr>
+              <a:t> después y qué se </a:t>
+            </a:r>
+            <a:r>
+              <a:rPr sz="1600" b="1" i="0">
+                <a:solidFill>
+                  <a:srgbClr val="2B2B2B"/>
+                </a:solidFill>
+                <a:latin typeface="Calibri"/>
+              </a:rPr>
+              <a:t>propone</a:t>
+            </a:r>
+            <a:r>
+              <a:rPr sz="1600" b="0" i="0">
+                <a:solidFill>
+                  <a:srgbClr val="2B2B2B"/>
+                </a:solidFill>
+                <a:latin typeface="Calibri"/>
+              </a:rPr>
+              <a:t> al final.</a:t>
+            </a:r>
+          </a:p>
+          <a:p>
+            <a:pPr>
+              <a:spcAft>
+                <a:spcPts val="1000"/>
+              </a:spcAft>
+            </a:pPr>
+            <a:r>
+              <a:rPr sz="1600" b="0" i="0">
+                <a:solidFill>
+                  <a:srgbClr val="2B2B2B"/>
+                </a:solidFill>
+                <a:latin typeface="Calibri"/>
+              </a:rPr>
+              <a:t>–   </a:t>
+            </a:r>
+            <a:r>
+              <a:rPr sz="1600" b="1" i="0">
+                <a:solidFill>
+                  <a:srgbClr val="2B2B2B"/>
+                </a:solidFill>
+                <a:latin typeface="Calibri"/>
+              </a:rPr>
+              <a:t>Hoy no se sube nada al aula:</a:t>
+            </a:r>
+            <a:r>
+              <a:rPr sz="1600" b="0" i="0">
+                <a:solidFill>
+                  <a:srgbClr val="2B2B2B"/>
+                </a:solidFill>
+                <a:latin typeface="Calibri"/>
+              </a:rPr>
+              <a:t> guarde `S03_ObjetivosJustificacion_Apellidos` (Google Doc o PDF) en su Drive y tráigalo a la próxima sesión. Es un </a:t>
+            </a:r>
+            <a:r>
+              <a:rPr sz="1600" b="1" i="0">
+                <a:solidFill>
+                  <a:srgbClr val="2B2B2B"/>
+                </a:solidFill>
+                <a:latin typeface="Calibri"/>
+              </a:rPr>
+              <a:t>avance formativo</a:t>
+            </a:r>
+            <a:r>
+              <a:rPr sz="1600" b="0" i="0">
+                <a:solidFill>
+                  <a:srgbClr val="2B2B2B"/>
+                </a:solidFill>
+                <a:latin typeface="Calibri"/>
+              </a:rPr>
+              <a:t>, se revisa en clase.</a:t>
+            </a:r>
+          </a:p>
+          <a:p>
+            <a:pPr>
+              <a:spcAft>
+                <a:spcPts val="1000"/>
+              </a:spcAft>
+            </a:pPr>
+            <a:r>
+              <a:rPr sz="1600" b="0" i="0">
+                <a:solidFill>
+                  <a:srgbClr val="2B2B2B"/>
+                </a:solidFill>
+                <a:latin typeface="Calibri"/>
+              </a:rPr>
+              <a:t>–   </a:t>
+            </a:r>
+            <a:r>
+              <a:rPr sz="1600" b="1" i="0">
+                <a:solidFill>
+                  <a:srgbClr val="2B2B2B"/>
+                </a:solidFill>
+                <a:latin typeface="Calibri"/>
+              </a:rPr>
+              <a:t>Esto alimenta:</a:t>
+            </a:r>
+            <a:r>
+              <a:rPr sz="1600" b="0" i="0">
+                <a:solidFill>
+                  <a:srgbClr val="2B2B2B"/>
+                </a:solidFill>
+                <a:latin typeface="Calibri"/>
+              </a:rPr>
+              <a:t> </a:t>
+            </a:r>
+            <a:r>
+              <a:rPr sz="1600" b="1" i="0">
+                <a:solidFill>
+                  <a:srgbClr val="2B2B2B"/>
+                </a:solidFill>
+                <a:latin typeface="Calibri"/>
+              </a:rPr>
+              <a:t>ACA 1</a:t>
+            </a:r>
+            <a:r>
+              <a:rPr sz="1600" b="0" i="0">
+                <a:solidFill>
+                  <a:srgbClr val="2B2B2B"/>
+                </a:solidFill>
+                <a:latin typeface="Calibri"/>
+              </a:rPr>
+              <a:t> —tarea, 25%—, el documento que </a:t>
+            </a:r>
+            <a:r>
+              <a:rPr sz="1600" b="1" i="0">
+                <a:solidFill>
+                  <a:srgbClr val="2B2B2B"/>
+                </a:solidFill>
+                <a:latin typeface="Calibri"/>
+              </a:rPr>
+              <a:t>sí</a:t>
+            </a:r>
+            <a:r>
+              <a:rPr sz="1600" b="0" i="0">
+                <a:solidFill>
+                  <a:srgbClr val="2B2B2B"/>
+                </a:solidFill>
+                <a:latin typeface="Calibri"/>
+              </a:rPr>
+              <a:t> recibe </a:t>
+            </a:r>
+            <a:r>
+              <a:rPr sz="1600" b="1" i="0">
+                <a:solidFill>
+                  <a:srgbClr val="2B2B2B"/>
+                </a:solidFill>
+                <a:latin typeface="Calibri"/>
+              </a:rPr>
+              <a:t>CDigital</a:t>
+            </a:r>
+            <a:r>
+              <a:rPr sz="1600" b="0" i="0">
+                <a:solidFill>
+                  <a:srgbClr val="2B2B2B"/>
+                </a:solidFill>
+                <a:latin typeface="Calibri"/>
+              </a:rPr>
+              <a:t>; cierra en la semana de la </a:t>
+            </a:r>
+            <a:r>
+              <a:rPr sz="1600" b="1" i="0">
+                <a:solidFill>
+                  <a:srgbClr val="2B2B2B"/>
+                </a:solidFill>
+                <a:latin typeface="Calibri"/>
+              </a:rPr>
+              <a:t>Sesión 07</a:t>
+            </a:r>
+            <a:r>
+              <a:rPr sz="1600" b="0" i="0">
+                <a:solidFill>
+                  <a:srgbClr val="2B2B2B"/>
+                </a:solidFill>
+                <a:latin typeface="Calibri"/>
+              </a:rPr>
+              <a:t>.</a:t>
+            </a:r>
+          </a:p>
+        </p:txBody>
+      </p:sp>
+      <p:sp>
+        <p:nvSpPr>
+          <p:cNvPr id="6" name="TextBox 5"/>
+          <p:cNvSpPr txBox="1"/>
+          <p:nvPr/>
+        </p:nvSpPr>
+        <p:spPr>
+          <a:xfrm>
+            <a:off x="11094415" y="6446520"/>
+            <a:ext cx="548640" cy="274320"/>
+          </a:xfrm>
+          <a:prstGeom prst="rect">
+            <a:avLst/>
+          </a:prstGeom>
+          <a:noFill/>
+        </p:spPr>
+        <p:txBody>
+          <a:bodyPr wrap="square" anchor="t" lIns="0" rIns="0" tIns="0" bIns="0">
+            <a:spAutoFit/>
+          </a:bodyPr>
+          <a:lstStyle/>
+          <a:p>
+            <a:pPr algn="r"/>
+            <a:r>
+              <a:rPr sz="1000" b="1" i="0">
+                <a:solidFill>
+                  <a:srgbClr val="8F989D"/>
+                </a:solidFill>
+                <a:latin typeface="Calibri"/>
+              </a:rPr>
+              <a:t>16</a:t>
+            </a:r>
+          </a:p>
+        </p:txBody>
+      </p:sp>
+    </p:spTree>
+  </p:cSld>
+  <p:clrMapOvr>
+    <a:masterClrMapping/>
+  </p:clrMapOvr>
+</p:sld>
+</file>
+
+<file path=ppt/slides/slide17.xml><?xml version="1.0" encoding="utf-8"?>
+<p:sld xmlns:a="http://schemas.openxmlformats.org/drawingml/2006/main" xmlns:p="http://schemas.openxmlformats.org/presentationml/2006/main" xmlns:r="http://schemas.openxmlformats.org/officeDocument/2006/relationships">
+  <p:cSld>
+    <p:bg>
+      <p:bgPr>
+        <a:solidFill>
+          <a:srgbClr val="FFFFFF"/>
+        </a:solidFill>
+        <a:effectLst/>
+      </p:bgPr>
+    </p:bg>
+    <p:spTree>
+      <p:nvGrpSpPr>
+        <p:cNvPr id="1" name=""/>
+        <p:cNvGrpSpPr/>
+        <p:nvPr/>
+      </p:nvGrpSpPr>
+      <p:grpSpPr/>
+      <p:sp>
+        <p:nvSpPr>
+          <p:cNvPr id="2" name="Rectangle 1"/>
+          <p:cNvSpPr/>
+          <p:nvPr/>
+        </p:nvSpPr>
+        <p:spPr>
+          <a:xfrm>
+            <a:off x="0" y="0"/>
+            <a:ext cx="12191695" cy="1188720"/>
+          </a:xfrm>
+          <a:prstGeom prst="rect">
+            <a:avLst/>
+          </a:prstGeom>
+          <a:solidFill>
+            <a:srgbClr val="0C2340"/>
+          </a:solidFill>
+          <a:ln>
+            <a:noFill/>
+          </a:ln>
+          <a:effectLst/>
+        </p:spPr>
+        <p:style>
+          <a:lnRef idx="1">
+            <a:schemeClr val="accent1"/>
+          </a:lnRef>
+          <a:fillRef idx="3">
+            <a:schemeClr val="accent1"/>
+          </a:fillRef>
+          <a:effectRef idx="2">
+            <a:schemeClr val="accent1"/>
+          </a:effectRef>
+          <a:fontRef idx="minor">
+            <a:schemeClr val="lt1"/>
+          </a:fontRef>
+        </p:style>
+        <p:txBody>
+          <a:bodyPr rtlCol="0" anchor="ctr"/>
+          <a:lstStyle/>
+          <a:p>
+            <a:pPr algn="ctr"/>
+          </a:p>
+        </p:txBody>
+      </p:sp>
+      <p:sp>
+        <p:nvSpPr>
+          <p:cNvPr id="3" name="TextBox 2"/>
+          <p:cNvSpPr txBox="1"/>
+          <p:nvPr/>
+        </p:nvSpPr>
+        <p:spPr>
+          <a:xfrm>
+            <a:off x="640080" y="0"/>
+            <a:ext cx="9082735" cy="1188720"/>
+          </a:xfrm>
+          <a:prstGeom prst="rect">
+            <a:avLst/>
+          </a:prstGeom>
+          <a:noFill/>
+        </p:spPr>
+        <p:txBody>
+          <a:bodyPr wrap="square" anchor="ctr" lIns="0" rIns="0" tIns="0" bIns="0">
+            <a:spAutoFit/>
+          </a:bodyPr>
+          <a:lstStyle/>
+          <a:p>
+            <a:pPr algn="ctr"/>
+            <a:r>
+              <a:rPr sz="2600" b="1" i="0">
+                <a:solidFill>
+                  <a:srgbClr val="FFFFFF"/>
+                </a:solidFill>
+                <a:latin typeface="Calibri"/>
+              </a:rPr>
               <a:t>Checklist de autoevaluación antes de subir el avance</a:t>
             </a:r>
           </a:p>
@@ -7121,7 +7760,7 @@
                 </a:solidFill>
                 <a:latin typeface="Calibri"/>
               </a:rPr>
-              <a:t>16</a:t>
+              <a:t>17</a:t>
             </a:r>
           </a:p>
         </p:txBody>
@@ -7134,7 +7773,7 @@
 </p:sld>
 </file>
 
-<file path=ppt/slides/slide17.xml><?xml version="1.0" encoding="utf-8"?>
+<file path=ppt/slides/slide18.xml><?xml version="1.0" encoding="utf-8"?>
 <p:sld xmlns:a="http://schemas.openxmlformats.org/drawingml/2006/main" xmlns:p="http://schemas.openxmlformats.org/presentationml/2006/main" xmlns:r="http://schemas.openxmlformats.org/officeDocument/2006/relationships">
   <p:cSld>
     <p:bg>
@@ -7538,7 +8177,7 @@
                 </a:solidFill>
                 <a:latin typeface="Calibri"/>
               </a:rPr>
-              <a:t>17</a:t>
+              <a:t>18</a:t>
             </a:r>
           </a:p>
         </p:txBody>
@@ -7585,7 +8224,1329 @@
 </p:sld>
 </file>
 
-<file path=ppt/slides/slide18.xml><?xml version="1.0" encoding="utf-8"?>
+<file path=ppt/slides/slide19.xml><?xml version="1.0" encoding="utf-8"?>
+<p:sld xmlns:a="http://schemas.openxmlformats.org/drawingml/2006/main" xmlns:p="http://schemas.openxmlformats.org/presentationml/2006/main" xmlns:r="http://schemas.openxmlformats.org/officeDocument/2006/relationships">
+  <p:cSld>
+    <p:bg>
+      <p:bgPr>
+        <a:solidFill>
+          <a:srgbClr val="FFFFFF"/>
+        </a:solidFill>
+        <a:effectLst/>
+      </p:bgPr>
+    </p:bg>
+    <p:spTree>
+      <p:nvGrpSpPr>
+        <p:cNvPr id="1" name=""/>
+        <p:cNvGrpSpPr/>
+        <p:nvPr/>
+      </p:nvGrpSpPr>
+      <p:grpSpPr/>
+      <p:sp>
+        <p:nvSpPr>
+          <p:cNvPr id="2" name="Rectangle 1"/>
+          <p:cNvSpPr/>
+          <p:nvPr/>
+        </p:nvSpPr>
+        <p:spPr>
+          <a:xfrm>
+            <a:off x="0" y="0"/>
+            <a:ext cx="12191695" cy="1188720"/>
+          </a:xfrm>
+          <a:prstGeom prst="rect">
+            <a:avLst/>
+          </a:prstGeom>
+          <a:solidFill>
+            <a:srgbClr val="0C2340"/>
+          </a:solidFill>
+          <a:ln>
+            <a:noFill/>
+          </a:ln>
+          <a:effectLst/>
+        </p:spPr>
+        <p:style>
+          <a:lnRef idx="1">
+            <a:schemeClr val="accent1"/>
+          </a:lnRef>
+          <a:fillRef idx="3">
+            <a:schemeClr val="accent1"/>
+          </a:fillRef>
+          <a:effectRef idx="2">
+            <a:schemeClr val="accent1"/>
+          </a:effectRef>
+          <a:fontRef idx="minor">
+            <a:schemeClr val="lt1"/>
+          </a:fontRef>
+        </p:style>
+        <p:txBody>
+          <a:bodyPr rtlCol="0" anchor="ctr"/>
+          <a:lstStyle/>
+          <a:p>
+            <a:pPr algn="ctr"/>
+          </a:p>
+        </p:txBody>
+      </p:sp>
+      <p:sp>
+        <p:nvSpPr>
+          <p:cNvPr id="3" name="TextBox 2"/>
+          <p:cNvSpPr txBox="1"/>
+          <p:nvPr/>
+        </p:nvSpPr>
+        <p:spPr>
+          <a:xfrm>
+            <a:off x="640080" y="0"/>
+            <a:ext cx="9082735" cy="1188720"/>
+          </a:xfrm>
+          <a:prstGeom prst="rect">
+            <a:avLst/>
+          </a:prstGeom>
+          <a:noFill/>
+        </p:spPr>
+        <p:txBody>
+          <a:bodyPr wrap="square" anchor="ctr" lIns="0" rIns="0" tIns="0" bIns="0">
+            <a:spAutoFit/>
+          </a:bodyPr>
+          <a:lstStyle/>
+          <a:p>
+            <a:pPr algn="ctr"/>
+            <a:r>
+              <a:rPr sz="2600" b="1" i="0">
+                <a:solidFill>
+                  <a:srgbClr val="FFFFFF"/>
+                </a:solidFill>
+                <a:latin typeface="Calibri"/>
+              </a:rPr>
+              <a:t>RUTA DE ENTREGABLES DEL CURSO</a:t>
+            </a:r>
+          </a:p>
+        </p:txBody>
+      </p:sp>
+      <p:sp>
+        <p:nvSpPr>
+          <p:cNvPr id="4" name="TextBox 3"/>
+          <p:cNvSpPr txBox="1"/>
+          <p:nvPr/>
+        </p:nvSpPr>
+        <p:spPr>
+          <a:xfrm>
+            <a:off x="640080" y="1280160"/>
+            <a:ext cx="10911535" cy="411480"/>
+          </a:xfrm>
+          <a:prstGeom prst="rect">
+            <a:avLst/>
+          </a:prstGeom>
+          <a:noFill/>
+        </p:spPr>
+        <p:txBody>
+          <a:bodyPr wrap="square" anchor="t" lIns="0" rIns="0" tIns="0" bIns="0">
+            <a:spAutoFit/>
+          </a:bodyPr>
+          <a:lstStyle/>
+          <a:p>
+            <a:pPr algn="ctr"/>
+            <a:r>
+              <a:rPr sz="1500" b="0" i="0">
+                <a:solidFill>
+                  <a:srgbClr val="2B2B2B"/>
+                </a:solidFill>
+                <a:latin typeface="Calibri"/>
+              </a:rPr>
+              <a:t>Sin fechas a propósito: aquí va </a:t>
+            </a:r>
+            <a:r>
+              <a:rPr sz="1500" b="1" i="0">
+                <a:solidFill>
+                  <a:srgbClr val="2B2B2B"/>
+                </a:solidFill>
+                <a:latin typeface="Calibri"/>
+              </a:rPr>
+              <a:t>en qué punto del curso</a:t>
+            </a:r>
+            <a:r>
+              <a:rPr sz="1500" b="0" i="0">
+                <a:solidFill>
+                  <a:srgbClr val="2B2B2B"/>
+                </a:solidFill>
+                <a:latin typeface="Calibri"/>
+              </a:rPr>
+              <a:t> cierra cada ítem · la ventana exacta la fija CDigital</a:t>
+            </a:r>
+          </a:p>
+        </p:txBody>
+      </p:sp>
+      <p:graphicFrame>
+        <p:nvGraphicFramePr>
+          <p:cNvPr id="5" name="Table 4"/>
+          <p:cNvGraphicFramePr>
+            <a:graphicFrameLocks noGrp="1"/>
+          </p:cNvGraphicFramePr>
+          <p:nvPr/>
+        </p:nvGraphicFramePr>
+        <p:xfrm>
+          <a:off x="640080" y="2011679"/>
+          <a:ext cx="10911533" cy="3017520"/>
+        </p:xfrm>
+        <a:graphic>
+          <a:graphicData uri="http://schemas.openxmlformats.org/drawingml/2006/table">
+            <a:tbl>
+              <a:tblPr>
+                <a:tableStyleId>{2D5ABB26-0587-4C30-8999-92F81FD0307C}</a:tableStyleId>
+              </a:tblPr>
+              <a:tblGrid>
+                <a:gridCol w="2659113"/>
+                <a:gridCol w="2659113"/>
+                <a:gridCol w="5593307"/>
+              </a:tblGrid>
+              <a:tr h="502920">
+                <a:tc>
+                  <a:txBody>
+                    <a:bodyPr/>
+                    <a:lstStyle/>
+                    <a:p>
+                      <a:pPr algn="l"/>
+                      <a:r>
+                        <a:rPr sz="1300" b="1" i="0">
+                          <a:solidFill>
+                            <a:srgbClr val="FFFFFF"/>
+                          </a:solidFill>
+                          <a:latin typeface="Calibri"/>
+                        </a:rPr>
+                        <a:t>Cierra en la semana de…</a:t>
+                      </a:r>
+                    </a:p>
+                  </a:txBody>
+                  <a:tcPr anchor="ctr" marL="109728" marR="91440" marT="36576" marB="36576">
+                    <a:solidFill>
+                      <a:srgbClr val="0C2340"/>
+                    </a:solidFill>
+                  </a:tcPr>
+                </a:tc>
+                <a:tc>
+                  <a:txBody>
+                    <a:bodyPr/>
+                    <a:lstStyle/>
+                    <a:p>
+                      <a:pPr algn="l"/>
+                      <a:r>
+                        <a:rPr sz="1300" b="1" i="0">
+                          <a:solidFill>
+                            <a:srgbClr val="FFFFFF"/>
+                          </a:solidFill>
+                          <a:latin typeface="Calibri"/>
+                        </a:rPr>
+                        <a:t>Entregable</a:t>
+                      </a:r>
+                    </a:p>
+                  </a:txBody>
+                  <a:tcPr anchor="ctr" marL="109728" marR="91440" marT="36576" marB="36576">
+                    <a:solidFill>
+                      <a:srgbClr val="0C2340"/>
+                    </a:solidFill>
+                  </a:tcPr>
+                </a:tc>
+                <a:tc>
+                  <a:txBody>
+                    <a:bodyPr/>
+                    <a:lstStyle/>
+                    <a:p>
+                      <a:pPr algn="l"/>
+                      <a:r>
+                        <a:rPr sz="1300" b="1" i="0">
+                          <a:solidFill>
+                            <a:srgbClr val="FFFFFF"/>
+                          </a:solidFill>
+                          <a:latin typeface="Calibri"/>
+                        </a:rPr>
+                        <a:t>Qué debes tener listo</a:t>
+                      </a:r>
+                    </a:p>
+                  </a:txBody>
+                  <a:tcPr anchor="ctr" marL="109728" marR="91440" marT="36576" marB="36576">
+                    <a:solidFill>
+                      <a:srgbClr val="0C2340"/>
+                    </a:solidFill>
+                  </a:tcPr>
+                </a:tc>
+              </a:tr>
+              <a:tr h="502920">
+                <a:tc>
+                  <a:txBody>
+                    <a:bodyPr/>
+                    <a:lstStyle/>
+                    <a:p>
+                      <a:pPr algn="l"/>
+                      <a:r>
+                        <a:rPr sz="1100" b="1" i="0">
+                          <a:solidFill>
+                            <a:srgbClr val="2B2B2B"/>
+                          </a:solidFill>
+                          <a:latin typeface="Calibri"/>
+                        </a:rPr>
+                        <a:t>Sesión 02</a:t>
+                      </a:r>
+                      <a:r>
+                        <a:rPr sz="1100" b="0" i="0">
+                          <a:solidFill>
+                            <a:srgbClr val="2B2B2B"/>
+                          </a:solidFill>
+                          <a:latin typeface="Calibri"/>
+                        </a:rPr>
+                        <a:t> · ya cerró</a:t>
+                      </a:r>
+                    </a:p>
+                  </a:txBody>
+                  <a:tcPr anchor="ctr" marL="109728" marR="91440" marT="36576" marB="36576">
+                    <a:solidFill>
+                      <a:srgbClr val="FFFFFF"/>
+                    </a:solidFill>
+                  </a:tcPr>
+                </a:tc>
+                <a:tc>
+                  <a:txBody>
+                    <a:bodyPr/>
+                    <a:lstStyle/>
+                    <a:p>
+                      <a:pPr algn="l"/>
+                      <a:r>
+                        <a:rPr sz="1100" b="1" i="0">
+                          <a:solidFill>
+                            <a:srgbClr val="2B2B2B"/>
+                          </a:solidFill>
+                          <a:latin typeface="Calibri"/>
+                        </a:rPr>
+                        <a:t>Quiz</a:t>
+                      </a:r>
+                      <a:r>
+                        <a:rPr sz="1100" b="0" i="0">
+                          <a:solidFill>
+                            <a:srgbClr val="2B2B2B"/>
+                          </a:solidFill>
+                          <a:latin typeface="Calibri"/>
+                        </a:rPr>
+                        <a:t> · Cuestionario · 25%</a:t>
+                      </a:r>
+                    </a:p>
+                  </a:txBody>
+                  <a:tcPr anchor="ctr" marL="109728" marR="91440" marT="36576" marB="36576">
+                    <a:solidFill>
+                      <a:srgbClr val="FFFFFF"/>
+                    </a:solidFill>
+                  </a:tcPr>
+                </a:tc>
+                <a:tc>
+                  <a:txBody>
+                    <a:bodyPr/>
+                    <a:lstStyle/>
+                    <a:p>
+                      <a:pPr algn="l"/>
+                      <a:r>
+                        <a:rPr sz="1100" b="0" i="0">
+                          <a:solidFill>
+                            <a:srgbClr val="2B2B2B"/>
+                          </a:solidFill>
+                          <a:latin typeface="Calibri"/>
+                        </a:rPr>
+                        <a:t>Estudia </a:t>
+                      </a:r>
+                      <a:r>
+                        <a:rPr sz="1100" b="1" i="0">
+                          <a:solidFill>
+                            <a:srgbClr val="2B2B2B"/>
+                          </a:solidFill>
+                          <a:latin typeface="Calibri"/>
+                        </a:rPr>
+                        <a:t>problema y pregunta</a:t>
+                      </a:r>
+                      <a:r>
+                        <a:rPr sz="1100" b="0" i="0">
+                          <a:solidFill>
+                            <a:srgbClr val="2B2B2B"/>
+                          </a:solidFill>
+                          <a:latin typeface="Calibri"/>
+                        </a:rPr>
+                        <a:t> de investigación; resuélvelo dentro de su ventana.</a:t>
+                      </a:r>
+                    </a:p>
+                  </a:txBody>
+                  <a:tcPr anchor="ctr" marL="109728" marR="91440" marT="36576" marB="36576">
+                    <a:solidFill>
+                      <a:srgbClr val="FFFFFF"/>
+                    </a:solidFill>
+                  </a:tcPr>
+                </a:tc>
+              </a:tr>
+              <a:tr h="502920">
+                <a:tc>
+                  <a:txBody>
+                    <a:bodyPr/>
+                    <a:lstStyle/>
+                    <a:p>
+                      <a:pPr algn="l"/>
+                      <a:r>
+                        <a:rPr sz="1100" b="1" i="0">
+                          <a:solidFill>
+                            <a:srgbClr val="2B2B2B"/>
+                          </a:solidFill>
+                          <a:latin typeface="Calibri"/>
+                        </a:rPr>
+                        <a:t>Sesión 07</a:t>
+                      </a:r>
+                      <a:r>
+                        <a:rPr sz="1100" b="0" i="0">
+                          <a:solidFill>
+                            <a:srgbClr val="2B2B2B"/>
+                          </a:solidFill>
+                          <a:latin typeface="Calibri"/>
+                        </a:rPr>
+                        <a:t> · pendiente</a:t>
+                      </a:r>
+                    </a:p>
+                  </a:txBody>
+                  <a:tcPr anchor="ctr" marL="109728" marR="91440" marT="36576" marB="36576">
+                    <a:solidFill>
+                      <a:srgbClr val="F2F2F2"/>
+                    </a:solidFill>
+                  </a:tcPr>
+                </a:tc>
+                <a:tc>
+                  <a:txBody>
+                    <a:bodyPr/>
+                    <a:lstStyle/>
+                    <a:p>
+                      <a:pPr algn="l"/>
+                      <a:r>
+                        <a:rPr sz="1100" b="1" i="0">
+                          <a:solidFill>
+                            <a:srgbClr val="2B2B2B"/>
+                          </a:solidFill>
+                          <a:latin typeface="Calibri"/>
+                        </a:rPr>
+                        <a:t>ACA 1</a:t>
+                      </a:r>
+                      <a:r>
+                        <a:rPr sz="1100" b="0" i="0">
+                          <a:solidFill>
+                            <a:srgbClr val="2B2B2B"/>
+                          </a:solidFill>
+                          <a:latin typeface="Calibri"/>
+                        </a:rPr>
+                        <a:t> · Tarea · 25%</a:t>
+                      </a:r>
+                    </a:p>
+                  </a:txBody>
+                  <a:tcPr anchor="ctr" marL="109728" marR="91440" marT="36576" marB="36576">
+                    <a:solidFill>
+                      <a:srgbClr val="F2F2F2"/>
+                    </a:solidFill>
+                  </a:tcPr>
+                </a:tc>
+                <a:tc>
+                  <a:txBody>
+                    <a:bodyPr/>
+                    <a:lstStyle/>
+                    <a:p>
+                      <a:pPr algn="l"/>
+                      <a:r>
+                        <a:rPr sz="1100" b="0" i="0">
+                          <a:solidFill>
+                            <a:srgbClr val="2B2B2B"/>
+                          </a:solidFill>
+                          <a:latin typeface="Calibri"/>
+                        </a:rPr>
+                        <a:t>Sube en </a:t>
+                      </a:r>
+                      <a:r>
+                        <a:rPr sz="1100" b="1" i="0">
+                          <a:solidFill>
+                            <a:srgbClr val="2B2B2B"/>
+                          </a:solidFill>
+                          <a:latin typeface="Calibri"/>
+                        </a:rPr>
+                        <a:t>plantilla APA</a:t>
+                      </a:r>
+                      <a:r>
+                        <a:rPr sz="1100" b="0" i="0">
+                          <a:solidFill>
+                            <a:srgbClr val="2B2B2B"/>
+                          </a:solidFill>
+                          <a:latin typeface="Calibri"/>
+                        </a:rPr>
+                        <a:t> problema, pregunta, objetivos, mínimo 6 antecedentes y los marcos.</a:t>
+                      </a:r>
+                    </a:p>
+                  </a:txBody>
+                  <a:tcPr anchor="ctr" marL="109728" marR="91440" marT="36576" marB="36576">
+                    <a:solidFill>
+                      <a:srgbClr val="F2F2F2"/>
+                    </a:solidFill>
+                  </a:tcPr>
+                </a:tc>
+              </a:tr>
+              <a:tr h="502920">
+                <a:tc>
+                  <a:txBody>
+                    <a:bodyPr/>
+                    <a:lstStyle/>
+                    <a:p>
+                      <a:pPr algn="l"/>
+                      <a:r>
+                        <a:rPr sz="1100" b="1" i="0">
+                          <a:solidFill>
+                            <a:srgbClr val="2B2B2B"/>
+                          </a:solidFill>
+                          <a:latin typeface="Calibri"/>
+                        </a:rPr>
+                        <a:t>Sesión 10</a:t>
+                      </a:r>
+                      <a:r>
+                        <a:rPr sz="1100" b="0" i="0">
+                          <a:solidFill>
+                            <a:srgbClr val="2B2B2B"/>
+                          </a:solidFill>
+                          <a:latin typeface="Calibri"/>
+                        </a:rPr>
+                        <a:t> · pendiente</a:t>
+                      </a:r>
+                    </a:p>
+                  </a:txBody>
+                  <a:tcPr anchor="ctr" marL="109728" marR="91440" marT="36576" marB="36576">
+                    <a:solidFill>
+                      <a:srgbClr val="FFFFFF"/>
+                    </a:solidFill>
+                  </a:tcPr>
+                </a:tc>
+                <a:tc>
+                  <a:txBody>
+                    <a:bodyPr/>
+                    <a:lstStyle/>
+                    <a:p>
+                      <a:pPr algn="l"/>
+                      <a:r>
+                        <a:rPr sz="1100" b="1" i="0">
+                          <a:solidFill>
+                            <a:srgbClr val="2B2B2B"/>
+                          </a:solidFill>
+                          <a:latin typeface="Calibri"/>
+                        </a:rPr>
+                        <a:t>ACA FINAL</a:t>
+                      </a:r>
+                      <a:r>
+                        <a:rPr sz="1100" b="0" i="0">
+                          <a:solidFill>
+                            <a:srgbClr val="2B2B2B"/>
+                          </a:solidFill>
+                          <a:latin typeface="Calibri"/>
+                        </a:rPr>
+                        <a:t> · Tarea · 42%</a:t>
+                      </a:r>
+                    </a:p>
+                  </a:txBody>
+                  <a:tcPr anchor="ctr" marL="109728" marR="91440" marT="36576" marB="36576">
+                    <a:solidFill>
+                      <a:srgbClr val="FFFFFF"/>
+                    </a:solidFill>
+                  </a:tcPr>
+                </a:tc>
+                <a:tc>
+                  <a:txBody>
+                    <a:bodyPr/>
+                    <a:lstStyle/>
+                    <a:p>
+                      <a:pPr algn="l"/>
+                      <a:r>
+                        <a:rPr sz="1100" b="0" i="0">
+                          <a:solidFill>
+                            <a:srgbClr val="2B2B2B"/>
+                          </a:solidFill>
+                          <a:latin typeface="Calibri"/>
+                        </a:rPr>
+                        <a:t>Sube el anteproyecto integrado con las </a:t>
+                      </a:r>
+                      <a:r>
+                        <a:rPr sz="1100" b="1" i="0">
+                          <a:solidFill>
+                            <a:srgbClr val="2B2B2B"/>
+                          </a:solidFill>
+                          <a:latin typeface="Calibri"/>
+                        </a:rPr>
+                        <a:t>correcciones</a:t>
+                      </a:r>
+                      <a:r>
+                        <a:rPr sz="1100" b="0" i="0">
+                          <a:solidFill>
+                            <a:srgbClr val="2B2B2B"/>
+                          </a:solidFill>
+                          <a:latin typeface="Calibri"/>
+                        </a:rPr>
+                        <a:t> de la ACA 1, metodología y viabilidad.</a:t>
+                      </a:r>
+                    </a:p>
+                  </a:txBody>
+                  <a:tcPr anchor="ctr" marL="109728" marR="91440" marT="36576" marB="36576">
+                    <a:solidFill>
+                      <a:srgbClr val="FFFFFF"/>
+                    </a:solidFill>
+                  </a:tcPr>
+                </a:tc>
+              </a:tr>
+              <a:tr h="502920">
+                <a:tc>
+                  <a:txBody>
+                    <a:bodyPr/>
+                    <a:lstStyle/>
+                    <a:p>
+                      <a:pPr algn="l"/>
+                      <a:r>
+                        <a:rPr sz="1100" b="1" i="0">
+                          <a:solidFill>
+                            <a:srgbClr val="2B2B2B"/>
+                          </a:solidFill>
+                          <a:latin typeface="Calibri"/>
+                        </a:rPr>
+                        <a:t>Sesión 11</a:t>
+                      </a:r>
+                      <a:r>
+                        <a:rPr sz="1100" b="0" i="0">
+                          <a:solidFill>
+                            <a:srgbClr val="2B2B2B"/>
+                          </a:solidFill>
+                          <a:latin typeface="Calibri"/>
+                        </a:rPr>
+                        <a:t> · pendiente</a:t>
+                      </a:r>
+                    </a:p>
+                  </a:txBody>
+                  <a:tcPr anchor="ctr" marL="109728" marR="91440" marT="36576" marB="36576">
+                    <a:solidFill>
+                      <a:srgbClr val="F2F2F2"/>
+                    </a:solidFill>
+                  </a:tcPr>
+                </a:tc>
+                <a:tc>
+                  <a:txBody>
+                    <a:bodyPr/>
+                    <a:lstStyle/>
+                    <a:p>
+                      <a:pPr algn="l"/>
+                      <a:r>
+                        <a:rPr sz="1100" b="1" i="0">
+                          <a:solidFill>
+                            <a:srgbClr val="2B2B2B"/>
+                          </a:solidFill>
+                          <a:latin typeface="Calibri"/>
+                        </a:rPr>
+                        <a:t>Autoevaluación</a:t>
+                      </a:r>
+                      <a:r>
+                        <a:rPr sz="1100" b="0" i="0">
+                          <a:solidFill>
+                            <a:srgbClr val="2B2B2B"/>
+                          </a:solidFill>
+                          <a:latin typeface="Calibri"/>
+                        </a:rPr>
+                        <a:t> · Cuestionario · 4%</a:t>
+                      </a:r>
+                    </a:p>
+                  </a:txBody>
+                  <a:tcPr anchor="ctr" marL="109728" marR="91440" marT="36576" marB="36576">
+                    <a:solidFill>
+                      <a:srgbClr val="F2F2F2"/>
+                    </a:solidFill>
+                  </a:tcPr>
+                </a:tc>
+                <a:tc>
+                  <a:txBody>
+                    <a:bodyPr/>
+                    <a:lstStyle/>
+                    <a:p>
+                      <a:pPr algn="l"/>
+                      <a:r>
+                        <a:rPr sz="1100" b="0" i="0">
+                          <a:solidFill>
+                            <a:srgbClr val="2B2B2B"/>
+                          </a:solidFill>
+                          <a:latin typeface="Calibri"/>
+                        </a:rPr>
+                        <a:t>Diligénciala tú, dentro de su ventana, según tu </a:t>
+                      </a:r>
+                      <a:r>
+                        <a:rPr sz="1100" b="1" i="0">
+                          <a:solidFill>
+                            <a:srgbClr val="2B2B2B"/>
+                          </a:solidFill>
+                          <a:latin typeface="Calibri"/>
+                        </a:rPr>
+                        <a:t>participación real</a:t>
+                      </a:r>
+                      <a:r>
+                        <a:rPr sz="1100" b="0" i="0">
+                          <a:solidFill>
+                            <a:srgbClr val="2B2B2B"/>
+                          </a:solidFill>
+                          <a:latin typeface="Calibri"/>
+                        </a:rPr>
+                        <a:t>.</a:t>
+                      </a:r>
+                    </a:p>
+                  </a:txBody>
+                  <a:tcPr anchor="ctr" marL="109728" marR="91440" marT="36576" marB="36576">
+                    <a:solidFill>
+                      <a:srgbClr val="F2F2F2"/>
+                    </a:solidFill>
+                  </a:tcPr>
+                </a:tc>
+              </a:tr>
+              <a:tr h="502920">
+                <a:tc>
+                  <a:txBody>
+                    <a:bodyPr/>
+                    <a:lstStyle/>
+                    <a:p>
+                      <a:pPr algn="l"/>
+                      <a:r>
+                        <a:rPr sz="1100" b="1" i="0">
+                          <a:solidFill>
+                            <a:srgbClr val="2B2B2B"/>
+                          </a:solidFill>
+                          <a:latin typeface="Calibri"/>
+                        </a:rPr>
+                        <a:t>Sesión 11</a:t>
+                      </a:r>
+                      <a:r>
+                        <a:rPr sz="1100" b="0" i="0">
+                          <a:solidFill>
+                            <a:srgbClr val="2B2B2B"/>
+                          </a:solidFill>
+                          <a:latin typeface="Calibri"/>
+                        </a:rPr>
+                        <a:t> · pendiente</a:t>
+                      </a:r>
+                    </a:p>
+                  </a:txBody>
+                  <a:tcPr anchor="ctr" marL="109728" marR="91440" marT="36576" marB="36576">
+                    <a:solidFill>
+                      <a:srgbClr val="FFFFFF"/>
+                    </a:solidFill>
+                  </a:tcPr>
+                </a:tc>
+                <a:tc>
+                  <a:txBody>
+                    <a:bodyPr/>
+                    <a:lstStyle/>
+                    <a:p>
+                      <a:pPr algn="l"/>
+                      <a:r>
+                        <a:rPr sz="1100" b="1" i="0">
+                          <a:solidFill>
+                            <a:srgbClr val="2B2B2B"/>
+                          </a:solidFill>
+                          <a:latin typeface="Calibri"/>
+                        </a:rPr>
+                        <a:t>Coevaluación</a:t>
+                      </a:r>
+                      <a:r>
+                        <a:rPr sz="1100" b="0" i="0">
+                          <a:solidFill>
+                            <a:srgbClr val="2B2B2B"/>
+                          </a:solidFill>
+                          <a:latin typeface="Calibri"/>
+                        </a:rPr>
+                        <a:t> · Foro · 4%</a:t>
+                      </a:r>
+                    </a:p>
+                  </a:txBody>
+                  <a:tcPr anchor="ctr" marL="109728" marR="91440" marT="36576" marB="36576">
+                    <a:solidFill>
+                      <a:srgbClr val="FFFFFF"/>
+                    </a:solidFill>
+                  </a:tcPr>
+                </a:tc>
+                <a:tc>
+                  <a:txBody>
+                    <a:bodyPr/>
+                    <a:lstStyle/>
+                    <a:p>
+                      <a:pPr algn="l"/>
+                      <a:r>
+                        <a:rPr sz="1100" b="1" i="0">
+                          <a:solidFill>
+                            <a:srgbClr val="2B2B2B"/>
+                          </a:solidFill>
+                          <a:latin typeface="Calibri"/>
+                        </a:rPr>
+                        <a:t>Publica</a:t>
+                      </a:r>
+                      <a:r>
+                        <a:rPr sz="1100" b="0" i="0">
+                          <a:solidFill>
+                            <a:srgbClr val="2B2B2B"/>
+                          </a:solidFill>
+                          <a:latin typeface="Calibri"/>
+                        </a:rPr>
+                        <a:t> tu propio aporte y valora hechos del trabajo del equipo, con respeto.</a:t>
+                      </a:r>
+                    </a:p>
+                  </a:txBody>
+                  <a:tcPr anchor="ctr" marL="109728" marR="91440" marT="36576" marB="36576">
+                    <a:solidFill>
+                      <a:srgbClr val="FFFFFF"/>
+                    </a:solidFill>
+                  </a:tcPr>
+                </a:tc>
+              </a:tr>
+            </a:tbl>
+          </a:graphicData>
+        </a:graphic>
+      </p:graphicFrame>
+      <p:sp>
+        <p:nvSpPr>
+          <p:cNvPr id="6" name="TextBox 5"/>
+          <p:cNvSpPr txBox="1"/>
+          <p:nvPr/>
+        </p:nvSpPr>
+        <p:spPr>
+          <a:xfrm>
+            <a:off x="640080" y="5166360"/>
+            <a:ext cx="10911535" cy="548640"/>
+          </a:xfrm>
+          <a:prstGeom prst="rect">
+            <a:avLst/>
+          </a:prstGeom>
+          <a:noFill/>
+        </p:spPr>
+        <p:txBody>
+          <a:bodyPr wrap="square" anchor="t" lIns="0" rIns="0" tIns="0" bIns="0">
+            <a:spAutoFit/>
+          </a:bodyPr>
+          <a:lstStyle/>
+          <a:p>
+            <a:r>
+              <a:rPr sz="1200" b="0" i="1">
+                <a:solidFill>
+                  <a:srgbClr val="2B2B2B"/>
+                </a:solidFill>
+                <a:latin typeface="Calibri"/>
+              </a:rPr>
+              <a:t>Esta misma tabla va al final de todas las sesiones. La </a:t>
+            </a:r>
+            <a:r>
+              <a:rPr sz="1200" b="1" i="1">
+                <a:solidFill>
+                  <a:srgbClr val="2B2B2B"/>
+                </a:solidFill>
+                <a:latin typeface="Calibri"/>
+              </a:rPr>
+              <a:t>fecha</a:t>
+            </a:r>
+            <a:r>
+              <a:rPr sz="1200" b="0" i="1">
+                <a:solidFill>
+                  <a:srgbClr val="2B2B2B"/>
+                </a:solidFill>
+                <a:latin typeface="Calibri"/>
+              </a:rPr>
+              <a:t> de cada ventana está en el enunciado del ítem (`Clases/Recursos/ACAs/`) y en el aula: si el aula y cualquier otro material se contradicen, </a:t>
+            </a:r>
+            <a:r>
+              <a:rPr sz="1200" b="1" i="1">
+                <a:solidFill>
+                  <a:srgbClr val="2B2B2B"/>
+                </a:solidFill>
+                <a:latin typeface="Calibri"/>
+              </a:rPr>
+              <a:t>manda el aula</a:t>
+            </a:r>
+            <a:r>
+              <a:rPr sz="1200" b="0" i="1">
+                <a:solidFill>
+                  <a:srgbClr val="2B2B2B"/>
+                </a:solidFill>
+                <a:latin typeface="Calibri"/>
+              </a:rPr>
+              <a:t>.</a:t>
+            </a:r>
+          </a:p>
+        </p:txBody>
+      </p:sp>
+      <p:sp>
+        <p:nvSpPr>
+          <p:cNvPr id="7" name="TextBox 6"/>
+          <p:cNvSpPr txBox="1"/>
+          <p:nvPr/>
+        </p:nvSpPr>
+        <p:spPr>
+          <a:xfrm>
+            <a:off x="11094415" y="6446520"/>
+            <a:ext cx="548640" cy="274320"/>
+          </a:xfrm>
+          <a:prstGeom prst="rect">
+            <a:avLst/>
+          </a:prstGeom>
+          <a:noFill/>
+        </p:spPr>
+        <p:txBody>
+          <a:bodyPr wrap="square" anchor="t" lIns="0" rIns="0" tIns="0" bIns="0">
+            <a:spAutoFit/>
+          </a:bodyPr>
+          <a:lstStyle/>
+          <a:p>
+            <a:pPr algn="r"/>
+            <a:r>
+              <a:rPr sz="1000" b="1" i="0">
+                <a:solidFill>
+                  <a:srgbClr val="8F989D"/>
+                </a:solidFill>
+                <a:latin typeface="Calibri"/>
+              </a:rPr>
+              <a:t>19</a:t>
+            </a:r>
+          </a:p>
+        </p:txBody>
+      </p:sp>
+    </p:spTree>
+  </p:cSld>
+  <p:clrMapOvr>
+    <a:masterClrMapping/>
+  </p:clrMapOvr>
+</p:sld>
+</file>
+
+<file path=ppt/slides/slide2.xml><?xml version="1.0" encoding="utf-8"?>
+<p:sld xmlns:a="http://schemas.openxmlformats.org/drawingml/2006/main" xmlns:p="http://schemas.openxmlformats.org/presentationml/2006/main" xmlns:r="http://schemas.openxmlformats.org/officeDocument/2006/relationships">
+  <p:cSld>
+    <p:bg>
+      <p:bgPr>
+        <a:solidFill>
+          <a:srgbClr val="FFFFFF"/>
+        </a:solidFill>
+        <a:effectLst/>
+      </p:bgPr>
+    </p:bg>
+    <p:spTree>
+      <p:nvGrpSpPr>
+        <p:cNvPr id="1" name=""/>
+        <p:cNvGrpSpPr/>
+        <p:nvPr/>
+      </p:nvGrpSpPr>
+      <p:grpSpPr/>
+      <p:sp>
+        <p:nvSpPr>
+          <p:cNvPr id="2" name="Rectangle 1"/>
+          <p:cNvSpPr/>
+          <p:nvPr/>
+        </p:nvSpPr>
+        <p:spPr>
+          <a:xfrm>
+            <a:off x="0" y="0"/>
+            <a:ext cx="12191695" cy="1188720"/>
+          </a:xfrm>
+          <a:prstGeom prst="rect">
+            <a:avLst/>
+          </a:prstGeom>
+          <a:solidFill>
+            <a:srgbClr val="0C2340"/>
+          </a:solidFill>
+          <a:ln>
+            <a:noFill/>
+          </a:ln>
+          <a:effectLst/>
+        </p:spPr>
+        <p:style>
+          <a:lnRef idx="1">
+            <a:schemeClr val="accent1"/>
+          </a:lnRef>
+          <a:fillRef idx="3">
+            <a:schemeClr val="accent1"/>
+          </a:fillRef>
+          <a:effectRef idx="2">
+            <a:schemeClr val="accent1"/>
+          </a:effectRef>
+          <a:fontRef idx="minor">
+            <a:schemeClr val="lt1"/>
+          </a:fontRef>
+        </p:style>
+        <p:txBody>
+          <a:bodyPr rtlCol="0" anchor="ctr"/>
+          <a:lstStyle/>
+          <a:p>
+            <a:pPr algn="ctr"/>
+          </a:p>
+        </p:txBody>
+      </p:sp>
+      <p:sp>
+        <p:nvSpPr>
+          <p:cNvPr id="3" name="TextBox 2"/>
+          <p:cNvSpPr txBox="1"/>
+          <p:nvPr/>
+        </p:nvSpPr>
+        <p:spPr>
+          <a:xfrm>
+            <a:off x="640080" y="0"/>
+            <a:ext cx="9082735" cy="1188720"/>
+          </a:xfrm>
+          <a:prstGeom prst="rect">
+            <a:avLst/>
+          </a:prstGeom>
+          <a:noFill/>
+        </p:spPr>
+        <p:txBody>
+          <a:bodyPr wrap="square" anchor="ctr" lIns="0" rIns="0" tIns="0" bIns="0">
+            <a:spAutoFit/>
+          </a:bodyPr>
+          <a:lstStyle/>
+          <a:p>
+            <a:pPr algn="ctr"/>
+            <a:r>
+              <a:rPr sz="2600" b="1" i="0">
+                <a:solidFill>
+                  <a:srgbClr val="FFFFFF"/>
+                </a:solidFill>
+                <a:latin typeface="Calibri"/>
+              </a:rPr>
+              <a:t>De la pregunta a los compromisos: qué cambia hoy</a:t>
+            </a:r>
+          </a:p>
+        </p:txBody>
+      </p:sp>
+      <p:sp>
+        <p:nvSpPr>
+          <p:cNvPr id="4" name="TextBox 3"/>
+          <p:cNvSpPr txBox="1"/>
+          <p:nvPr/>
+        </p:nvSpPr>
+        <p:spPr>
+          <a:xfrm>
+            <a:off x="640080" y="1691639"/>
+            <a:ext cx="10911535" cy="4617720"/>
+          </a:xfrm>
+          <a:prstGeom prst="rect">
+            <a:avLst/>
+          </a:prstGeom>
+          <a:noFill/>
+        </p:spPr>
+        <p:txBody>
+          <a:bodyPr wrap="square" anchor="t" lIns="0" rIns="0" tIns="0" bIns="0">
+            <a:spAutoFit/>
+          </a:bodyPr>
+          <a:lstStyle/>
+          <a:p>
+            <a:pPr>
+              <a:spcAft>
+                <a:spcPts val="1000"/>
+              </a:spcAft>
+            </a:pPr>
+            <a:r>
+              <a:rPr sz="1600" b="0" i="0">
+                <a:solidFill>
+                  <a:srgbClr val="2B2B2B"/>
+                </a:solidFill>
+                <a:latin typeface="Calibri"/>
+              </a:rPr>
+              <a:t>–   La sesión pasada la pregunta </a:t>
+            </a:r>
+            <a:r>
+              <a:rPr sz="1600" b="1" i="0">
+                <a:solidFill>
+                  <a:srgbClr val="2B2B2B"/>
+                </a:solidFill>
+                <a:latin typeface="Calibri"/>
+              </a:rPr>
+              <a:t>abrió</a:t>
+            </a:r>
+            <a:r>
+              <a:rPr sz="1600" b="0" i="0">
+                <a:solidFill>
+                  <a:srgbClr val="2B2B2B"/>
+                </a:solidFill>
+                <a:latin typeface="Calibri"/>
+              </a:rPr>
+              <a:t> el trabajo. Hoy lo </a:t>
+            </a:r>
+            <a:r>
+              <a:rPr sz="1600" b="1" i="0">
+                <a:solidFill>
+                  <a:srgbClr val="2B2B2B"/>
+                </a:solidFill>
+                <a:latin typeface="Calibri"/>
+              </a:rPr>
+              <a:t>cerramos con compromisos</a:t>
+            </a:r>
+            <a:r>
+              <a:rPr sz="1600" b="0" i="0">
+                <a:solidFill>
+                  <a:srgbClr val="2B2B2B"/>
+                </a:solidFill>
+                <a:latin typeface="Calibri"/>
+              </a:rPr>
+              <a:t>.</a:t>
+            </a:r>
+          </a:p>
+          <a:p>
+            <a:pPr>
+              <a:spcAft>
+                <a:spcPts val="1000"/>
+              </a:spcAft>
+            </a:pPr>
+            <a:r>
+              <a:rPr sz="1600" b="0" i="0">
+                <a:solidFill>
+                  <a:srgbClr val="2B2B2B"/>
+                </a:solidFill>
+                <a:latin typeface="Calibri"/>
+              </a:rPr>
+              <a:t>–   Un objetivo es una </a:t>
+            </a:r>
+            <a:r>
+              <a:rPr sz="1600" b="1" i="0">
+                <a:solidFill>
+                  <a:srgbClr val="2B2B2B"/>
+                </a:solidFill>
+                <a:latin typeface="Calibri"/>
+              </a:rPr>
+              <a:t>promesa verificable</a:t>
+            </a:r>
+            <a:r>
+              <a:rPr sz="1600" b="0" i="0">
+                <a:solidFill>
+                  <a:srgbClr val="2B2B2B"/>
+                </a:solidFill>
+                <a:latin typeface="Calibri"/>
+              </a:rPr>
+              <a:t>: alguien debe poder decir “esto se cumplió” o “esto no”.</a:t>
+            </a:r>
+          </a:p>
+          <a:p>
+            <a:pPr lvl="1">
+              <a:spcAft>
+                <a:spcPts val="600"/>
+              </a:spcAft>
+            </a:pPr>
+            <a:r>
+              <a:rPr sz="1500" b="0" i="0">
+                <a:solidFill>
+                  <a:srgbClr val="2B2B2B"/>
+                </a:solidFill>
+                <a:latin typeface="Calibri"/>
+              </a:rPr>
+              <a:t>●   Por eso los objetivos que escriban hoy son los que en Proyecto II se van a </a:t>
+            </a:r>
+            <a:r>
+              <a:rPr sz="1500" b="1" i="0">
+                <a:solidFill>
+                  <a:srgbClr val="2B2B2B"/>
+                </a:solidFill>
+                <a:latin typeface="Calibri"/>
+              </a:rPr>
+              <a:t>tachar uno por uno</a:t>
+            </a:r>
+            <a:r>
+              <a:rPr sz="1500" b="0" i="0">
+                <a:solidFill>
+                  <a:srgbClr val="2B2B2B"/>
+                </a:solidFill>
+                <a:latin typeface="Calibri"/>
+              </a:rPr>
+              <a:t>.</a:t>
+            </a:r>
+          </a:p>
+          <a:p>
+            <a:pPr>
+              <a:spcAft>
+                <a:spcPts val="1000"/>
+              </a:spcAft>
+            </a:pPr>
+            <a:r>
+              <a:rPr sz="1600" b="0" i="0">
+                <a:solidFill>
+                  <a:srgbClr val="2B2B2B"/>
+                </a:solidFill>
+                <a:latin typeface="Calibri"/>
+              </a:rPr>
+              <a:t>–   Caso de aula: “Objetivo específico 1: buscar artículos sobre IA”. Eso no es un objetivo, es su lunes.</a:t>
+            </a:r>
+          </a:p>
+          <a:p>
+            <a:pPr lvl="1">
+              <a:spcAft>
+                <a:spcPts val="600"/>
+              </a:spcAft>
+            </a:pPr>
+            <a:r>
+              <a:rPr sz="1500" b="0" i="0">
+                <a:solidFill>
+                  <a:srgbClr val="2B2B2B"/>
+                </a:solidFill>
+                <a:latin typeface="Calibri"/>
+              </a:rPr>
+              <a:t>●   Un objetivo produce </a:t>
+            </a:r>
+            <a:r>
+              <a:rPr sz="1500" b="1" i="0">
+                <a:solidFill>
+                  <a:srgbClr val="2B2B2B"/>
+                </a:solidFill>
+                <a:latin typeface="Calibri"/>
+              </a:rPr>
+              <a:t>conocimiento</a:t>
+            </a:r>
+            <a:r>
+              <a:rPr sz="1500" b="0" i="0">
+                <a:solidFill>
+                  <a:srgbClr val="2B2B2B"/>
+                </a:solidFill>
+                <a:latin typeface="Calibri"/>
+              </a:rPr>
+              <a:t>; una actividad solo consume tiempo.</a:t>
+            </a:r>
+          </a:p>
+          <a:p>
+            <a:pPr>
+              <a:spcAft>
+                <a:spcPts val="1000"/>
+              </a:spcAft>
+            </a:pPr>
+            <a:r>
+              <a:rPr sz="1600" b="0" i="0">
+                <a:solidFill>
+                  <a:srgbClr val="2B2B2B"/>
+                </a:solidFill>
+                <a:latin typeface="Calibri"/>
+              </a:rPr>
+              <a:t>–   Hoy salen con el bloque de formulación casi completo: general, específicos, justificación, alcances y limitaciones.</a:t>
+            </a:r>
+          </a:p>
+          <a:p>
+            <a:pPr>
+              <a:spcAft>
+                <a:spcPts val="1000"/>
+              </a:spcAft>
+            </a:pPr>
+            <a:r>
+              <a:rPr sz="1600" b="0" i="0">
+                <a:solidFill>
+                  <a:srgbClr val="2B2B2B"/>
+                </a:solidFill>
+                <a:latin typeface="Calibri"/>
+              </a:rPr>
+              <a:t>–   Ese bloque completo, leído de corrido, debe sonar a </a:t>
+            </a:r>
+            <a:r>
+              <a:rPr sz="1600" b="1" i="0">
+                <a:solidFill>
+                  <a:srgbClr val="2B2B2B"/>
+                </a:solidFill>
+                <a:latin typeface="Calibri"/>
+              </a:rPr>
+              <a:t>una sola historia sin saltos</a:t>
+            </a:r>
+            <a:r>
+              <a:rPr sz="1600" b="0" i="0">
+                <a:solidFill>
+                  <a:srgbClr val="2B2B2B"/>
+                </a:solidFill>
+                <a:latin typeface="Calibri"/>
+              </a:rPr>
+              <a:t>.</a:t>
+            </a:r>
+          </a:p>
+        </p:txBody>
+      </p:sp>
+      <p:sp>
+        <p:nvSpPr>
+          <p:cNvPr id="5" name="TextBox 4"/>
+          <p:cNvSpPr txBox="1"/>
+          <p:nvPr/>
+        </p:nvSpPr>
+        <p:spPr>
+          <a:xfrm>
+            <a:off x="11094415" y="6446520"/>
+            <a:ext cx="548640" cy="274320"/>
+          </a:xfrm>
+          <a:prstGeom prst="rect">
+            <a:avLst/>
+          </a:prstGeom>
+          <a:noFill/>
+        </p:spPr>
+        <p:txBody>
+          <a:bodyPr wrap="square" anchor="t" lIns="0" rIns="0" tIns="0" bIns="0">
+            <a:spAutoFit/>
+          </a:bodyPr>
+          <a:lstStyle/>
+          <a:p>
+            <a:pPr algn="r"/>
+            <a:r>
+              <a:rPr sz="1000" b="1" i="0">
+                <a:solidFill>
+                  <a:srgbClr val="8F989D"/>
+                </a:solidFill>
+                <a:latin typeface="Calibri"/>
+              </a:rPr>
+              <a:t>2</a:t>
+            </a:r>
+          </a:p>
+        </p:txBody>
+      </p:sp>
+      <p:sp>
+        <p:nvSpPr>
+          <p:cNvPr id="6" name="TextBox 5"/>
+          <p:cNvSpPr txBox="1"/>
+          <p:nvPr/>
+        </p:nvSpPr>
+        <p:spPr>
+          <a:xfrm>
+            <a:off x="640080" y="5943600"/>
+            <a:ext cx="9997135" cy="457200"/>
+          </a:xfrm>
+          <a:prstGeom prst="rect">
+            <a:avLst/>
+          </a:prstGeom>
+          <a:noFill/>
+        </p:spPr>
+        <p:txBody>
+          <a:bodyPr wrap="square" anchor="t" lIns="0" rIns="0" tIns="0" bIns="0">
+            <a:spAutoFit/>
+          </a:bodyPr>
+          <a:lstStyle/>
+          <a:p>
+            <a:r>
+              <a:rPr sz="1200" b="0" i="1">
+                <a:solidFill>
+                  <a:srgbClr val="2B2B2B"/>
+                </a:solidFill>
+                <a:latin typeface="Calibri"/>
+              </a:rPr>
+              <a:t>Si su pregunta cambió durante la semana, actualícela </a:t>
+            </a:r>
+            <a:r>
+              <a:rPr sz="1200" b="1" i="1">
+                <a:solidFill>
+                  <a:srgbClr val="2B2B2B"/>
+                </a:solidFill>
+                <a:latin typeface="Calibri"/>
+              </a:rPr>
+              <a:t>ahora</a:t>
+            </a:r>
+            <a:r>
+              <a:rPr sz="1200" b="0" i="1">
+                <a:solidFill>
+                  <a:srgbClr val="2B2B2B"/>
+                </a:solidFill>
+                <a:latin typeface="Calibri"/>
+              </a:rPr>
+              <a:t>: absolutamente todo lo de hoy cuelga de ella.</a:t>
+            </a:r>
+          </a:p>
+        </p:txBody>
+      </p:sp>
+    </p:spTree>
+  </p:cSld>
+  <p:clrMapOvr>
+    <a:masterClrMapping/>
+  </p:clrMapOvr>
+</p:sld>
+</file>
+
+<file path=ppt/slides/slide20.xml><?xml version="1.0" encoding="utf-8"?>
 <p:sld xmlns:a="http://schemas.openxmlformats.org/drawingml/2006/main" xmlns:p="http://schemas.openxmlformats.org/presentationml/2006/main" xmlns:r="http://schemas.openxmlformats.org/officeDocument/2006/relationships">
   <p:cSld>
     <p:bg>
@@ -7792,441 +9753,6 @@
                 <a:latin typeface="Calibri"/>
               </a:rPr>
               <a:t>PROYECTO I</a:t>
-            </a:r>
-          </a:p>
-        </p:txBody>
-      </p:sp>
-    </p:spTree>
-  </p:cSld>
-  <p:clrMapOvr>
-    <a:masterClrMapping/>
-  </p:clrMapOvr>
-</p:sld>
-</file>
-
-<file path=ppt/slides/slide2.xml><?xml version="1.0" encoding="utf-8"?>
-<p:sld xmlns:a="http://schemas.openxmlformats.org/drawingml/2006/main" xmlns:p="http://schemas.openxmlformats.org/presentationml/2006/main" xmlns:r="http://schemas.openxmlformats.org/officeDocument/2006/relationships">
-  <p:cSld>
-    <p:bg>
-      <p:bgPr>
-        <a:solidFill>
-          <a:srgbClr val="FFFFFF"/>
-        </a:solidFill>
-        <a:effectLst/>
-      </p:bgPr>
-    </p:bg>
-    <p:spTree>
-      <p:nvGrpSpPr>
-        <p:cNvPr id="1" name=""/>
-        <p:cNvGrpSpPr/>
-        <p:nvPr/>
-      </p:nvGrpSpPr>
-      <p:grpSpPr/>
-      <p:sp>
-        <p:nvSpPr>
-          <p:cNvPr id="2" name="Rectangle 1"/>
-          <p:cNvSpPr/>
-          <p:nvPr/>
-        </p:nvSpPr>
-        <p:spPr>
-          <a:xfrm>
-            <a:off x="0" y="0"/>
-            <a:ext cx="12191695" cy="1188720"/>
-          </a:xfrm>
-          <a:prstGeom prst="rect">
-            <a:avLst/>
-          </a:prstGeom>
-          <a:solidFill>
-            <a:srgbClr val="0C2340"/>
-          </a:solidFill>
-          <a:ln>
-            <a:noFill/>
-          </a:ln>
-          <a:effectLst/>
-        </p:spPr>
-        <p:style>
-          <a:lnRef idx="1">
-            <a:schemeClr val="accent1"/>
-          </a:lnRef>
-          <a:fillRef idx="3">
-            <a:schemeClr val="accent1"/>
-          </a:fillRef>
-          <a:effectRef idx="2">
-            <a:schemeClr val="accent1"/>
-          </a:effectRef>
-          <a:fontRef idx="minor">
-            <a:schemeClr val="lt1"/>
-          </a:fontRef>
-        </p:style>
-        <p:txBody>
-          <a:bodyPr rtlCol="0" anchor="ctr"/>
-          <a:lstStyle/>
-          <a:p>
-            <a:pPr algn="ctr"/>
-          </a:p>
-        </p:txBody>
-      </p:sp>
-      <p:sp>
-        <p:nvSpPr>
-          <p:cNvPr id="3" name="TextBox 2"/>
-          <p:cNvSpPr txBox="1"/>
-          <p:nvPr/>
-        </p:nvSpPr>
-        <p:spPr>
-          <a:xfrm>
-            <a:off x="640080" y="0"/>
-            <a:ext cx="9082735" cy="1188720"/>
-          </a:xfrm>
-          <a:prstGeom prst="rect">
-            <a:avLst/>
-          </a:prstGeom>
-          <a:noFill/>
-        </p:spPr>
-        <p:txBody>
-          <a:bodyPr wrap="square" anchor="ctr" lIns="0" rIns="0" tIns="0" bIns="0">
-            <a:spAutoFit/>
-          </a:bodyPr>
-          <a:lstStyle/>
-          <a:p>
-            <a:pPr algn="ctr"/>
-            <a:r>
-              <a:rPr sz="2600" b="1" i="0">
-                <a:solidFill>
-                  <a:srgbClr val="FFFFFF"/>
-                </a:solidFill>
-                <a:latin typeface="Calibri"/>
-              </a:rPr>
-              <a:t>De la pregunta a los compromisos: qué cambia hoy</a:t>
-            </a:r>
-          </a:p>
-        </p:txBody>
-      </p:sp>
-      <p:sp>
-        <p:nvSpPr>
-          <p:cNvPr id="4" name="TextBox 3"/>
-          <p:cNvSpPr txBox="1"/>
-          <p:nvPr/>
-        </p:nvSpPr>
-        <p:spPr>
-          <a:xfrm>
-            <a:off x="640080" y="1691639"/>
-            <a:ext cx="10911535" cy="4617720"/>
-          </a:xfrm>
-          <a:prstGeom prst="rect">
-            <a:avLst/>
-          </a:prstGeom>
-          <a:noFill/>
-        </p:spPr>
-        <p:txBody>
-          <a:bodyPr wrap="square" anchor="t" lIns="0" rIns="0" tIns="0" bIns="0">
-            <a:spAutoFit/>
-          </a:bodyPr>
-          <a:lstStyle/>
-          <a:p>
-            <a:pPr>
-              <a:spcAft>
-                <a:spcPts val="1000"/>
-              </a:spcAft>
-            </a:pPr>
-            <a:r>
-              <a:rPr sz="1600" b="0" i="0">
-                <a:solidFill>
-                  <a:srgbClr val="2B2B2B"/>
-                </a:solidFill>
-                <a:latin typeface="Calibri"/>
-              </a:rPr>
-              <a:t>–   La sesión pasada la pregunta </a:t>
-            </a:r>
-            <a:r>
-              <a:rPr sz="1600" b="1" i="0">
-                <a:solidFill>
-                  <a:srgbClr val="2B2B2B"/>
-                </a:solidFill>
-                <a:latin typeface="Calibri"/>
-              </a:rPr>
-              <a:t>abrió</a:t>
-            </a:r>
-            <a:r>
-              <a:rPr sz="1600" b="0" i="0">
-                <a:solidFill>
-                  <a:srgbClr val="2B2B2B"/>
-                </a:solidFill>
-                <a:latin typeface="Calibri"/>
-              </a:rPr>
-              <a:t> el trabajo. Hoy lo </a:t>
-            </a:r>
-            <a:r>
-              <a:rPr sz="1600" b="1" i="0">
-                <a:solidFill>
-                  <a:srgbClr val="2B2B2B"/>
-                </a:solidFill>
-                <a:latin typeface="Calibri"/>
-              </a:rPr>
-              <a:t>cerramos con compromisos</a:t>
-            </a:r>
-            <a:r>
-              <a:rPr sz="1600" b="0" i="0">
-                <a:solidFill>
-                  <a:srgbClr val="2B2B2B"/>
-                </a:solidFill>
-                <a:latin typeface="Calibri"/>
-              </a:rPr>
-              <a:t>.</a:t>
-            </a:r>
-          </a:p>
-          <a:p>
-            <a:pPr>
-              <a:spcAft>
-                <a:spcPts val="1000"/>
-              </a:spcAft>
-            </a:pPr>
-            <a:r>
-              <a:rPr sz="1600" b="0" i="0">
-                <a:solidFill>
-                  <a:srgbClr val="2B2B2B"/>
-                </a:solidFill>
-                <a:latin typeface="Calibri"/>
-              </a:rPr>
-              <a:t>–   Un objetivo es una </a:t>
-            </a:r>
-            <a:r>
-              <a:rPr sz="1600" b="1" i="0">
-                <a:solidFill>
-                  <a:srgbClr val="2B2B2B"/>
-                </a:solidFill>
-                <a:latin typeface="Calibri"/>
-              </a:rPr>
-              <a:t>promesa verificable</a:t>
-            </a:r>
-            <a:r>
-              <a:rPr sz="1600" b="0" i="0">
-                <a:solidFill>
-                  <a:srgbClr val="2B2B2B"/>
-                </a:solidFill>
-                <a:latin typeface="Calibri"/>
-              </a:rPr>
-              <a:t>: alguien debe poder decir “esto se cumplió” o “esto no”.</a:t>
-            </a:r>
-          </a:p>
-          <a:p>
-            <a:pPr lvl="1">
-              <a:spcAft>
-                <a:spcPts val="600"/>
-              </a:spcAft>
-            </a:pPr>
-            <a:r>
-              <a:rPr sz="1500" b="0" i="0">
-                <a:solidFill>
-                  <a:srgbClr val="2B2B2B"/>
-                </a:solidFill>
-                <a:latin typeface="Calibri"/>
-              </a:rPr>
-              <a:t>●   Por eso los objetivos que escriban hoy son los que en Proyecto II se van a </a:t>
-            </a:r>
-            <a:r>
-              <a:rPr sz="1500" b="1" i="0">
-                <a:solidFill>
-                  <a:srgbClr val="2B2B2B"/>
-                </a:solidFill>
-                <a:latin typeface="Calibri"/>
-              </a:rPr>
-              <a:t>tachar uno por uno</a:t>
-            </a:r>
-            <a:r>
-              <a:rPr sz="1500" b="0" i="0">
-                <a:solidFill>
-                  <a:srgbClr val="2B2B2B"/>
-                </a:solidFill>
-                <a:latin typeface="Calibri"/>
-              </a:rPr>
-              <a:t>.</a:t>
-            </a:r>
-          </a:p>
-          <a:p>
-            <a:pPr>
-              <a:spcAft>
-                <a:spcPts val="1000"/>
-              </a:spcAft>
-            </a:pPr>
-            <a:r>
-              <a:rPr sz="1600" b="0" i="0">
-                <a:solidFill>
-                  <a:srgbClr val="2B2B2B"/>
-                </a:solidFill>
-                <a:latin typeface="Calibri"/>
-              </a:rPr>
-              <a:t>–   Caso de aula: “Objetivo específico 1: buscar artículos sobre IA”. Eso no es un objetivo, es su lunes.</a:t>
-            </a:r>
-          </a:p>
-          <a:p>
-            <a:pPr lvl="1">
-              <a:spcAft>
-                <a:spcPts val="600"/>
-              </a:spcAft>
-            </a:pPr>
-            <a:r>
-              <a:rPr sz="1500" b="0" i="0">
-                <a:solidFill>
-                  <a:srgbClr val="2B2B2B"/>
-                </a:solidFill>
-                <a:latin typeface="Calibri"/>
-              </a:rPr>
-              <a:t>●   Un objetivo produce </a:t>
-            </a:r>
-            <a:r>
-              <a:rPr sz="1500" b="1" i="0">
-                <a:solidFill>
-                  <a:srgbClr val="2B2B2B"/>
-                </a:solidFill>
-                <a:latin typeface="Calibri"/>
-              </a:rPr>
-              <a:t>conocimiento</a:t>
-            </a:r>
-            <a:r>
-              <a:rPr sz="1500" b="0" i="0">
-                <a:solidFill>
-                  <a:srgbClr val="2B2B2B"/>
-                </a:solidFill>
-                <a:latin typeface="Calibri"/>
-              </a:rPr>
-              <a:t>; una actividad solo consume tiempo.</a:t>
-            </a:r>
-          </a:p>
-          <a:p>
-            <a:pPr>
-              <a:spcAft>
-                <a:spcPts val="1000"/>
-              </a:spcAft>
-            </a:pPr>
-            <a:r>
-              <a:rPr sz="1600" b="0" i="0">
-                <a:solidFill>
-                  <a:srgbClr val="2B2B2B"/>
-                </a:solidFill>
-                <a:latin typeface="Calibri"/>
-              </a:rPr>
-              <a:t>–   Hoy salen con el bloque de formulación casi completo: general, específicos, justificación, alcances y limitaciones.</a:t>
-            </a:r>
-          </a:p>
-          <a:p>
-            <a:pPr>
-              <a:spcAft>
-                <a:spcPts val="1000"/>
-              </a:spcAft>
-            </a:pPr>
-            <a:r>
-              <a:rPr sz="1600" b="0" i="0">
-                <a:solidFill>
-                  <a:srgbClr val="2B2B2B"/>
-                </a:solidFill>
-                <a:latin typeface="Calibri"/>
-              </a:rPr>
-              <a:t>–   Ese bloque completo, leído de corrido, debe sonar a </a:t>
-            </a:r>
-            <a:r>
-              <a:rPr sz="1600" b="1" i="0">
-                <a:solidFill>
-                  <a:srgbClr val="2B2B2B"/>
-                </a:solidFill>
-                <a:latin typeface="Calibri"/>
-              </a:rPr>
-              <a:t>una sola historia sin saltos</a:t>
-            </a:r>
-            <a:r>
-              <a:rPr sz="1600" b="0" i="0">
-                <a:solidFill>
-                  <a:srgbClr val="2B2B2B"/>
-                </a:solidFill>
-                <a:latin typeface="Calibri"/>
-              </a:rPr>
-              <a:t>.</a:t>
-            </a:r>
-          </a:p>
-        </p:txBody>
-      </p:sp>
-      <p:sp>
-        <p:nvSpPr>
-          <p:cNvPr id="5" name="TextBox 4"/>
-          <p:cNvSpPr txBox="1"/>
-          <p:nvPr/>
-        </p:nvSpPr>
-        <p:spPr>
-          <a:xfrm>
-            <a:off x="11094415" y="6446520"/>
-            <a:ext cx="548640" cy="274320"/>
-          </a:xfrm>
-          <a:prstGeom prst="rect">
-            <a:avLst/>
-          </a:prstGeom>
-          <a:noFill/>
-        </p:spPr>
-        <p:txBody>
-          <a:bodyPr wrap="square" anchor="t" lIns="0" rIns="0" tIns="0" bIns="0">
-            <a:spAutoFit/>
-          </a:bodyPr>
-          <a:lstStyle/>
-          <a:p>
-            <a:pPr algn="r"/>
-            <a:r>
-              <a:rPr sz="1000" b="1" i="0">
-                <a:solidFill>
-                  <a:srgbClr val="8F989D"/>
-                </a:solidFill>
-                <a:latin typeface="Calibri"/>
-              </a:rPr>
-              <a:t>2</a:t>
-            </a:r>
-          </a:p>
-        </p:txBody>
-      </p:sp>
-      <p:sp>
-        <p:nvSpPr>
-          <p:cNvPr id="6" name="TextBox 5"/>
-          <p:cNvSpPr txBox="1"/>
-          <p:nvPr/>
-        </p:nvSpPr>
-        <p:spPr>
-          <a:xfrm>
-            <a:off x="640080" y="5943600"/>
-            <a:ext cx="9997135" cy="457200"/>
-          </a:xfrm>
-          <a:prstGeom prst="rect">
-            <a:avLst/>
-          </a:prstGeom>
-          <a:noFill/>
-        </p:spPr>
-        <p:txBody>
-          <a:bodyPr wrap="square" anchor="t" lIns="0" rIns="0" tIns="0" bIns="0">
-            <a:spAutoFit/>
-          </a:bodyPr>
-          <a:lstStyle/>
-          <a:p>
-            <a:r>
-              <a:rPr sz="1200" b="0" i="1">
-                <a:solidFill>
-                  <a:srgbClr val="2B2B2B"/>
-                </a:solidFill>
-                <a:latin typeface="Calibri"/>
-              </a:rPr>
-              <a:t>Si su pregunta cambió durante la semana, actualícela </a:t>
-            </a:r>
-            <a:r>
-              <a:rPr sz="1200" b="1" i="1">
-                <a:solidFill>
-                  <a:srgbClr val="2B2B2B"/>
-                </a:solidFill>
-                <a:latin typeface="Calibri"/>
-              </a:rPr>
-              <a:t>ahora</a:t>
-            </a:r>
-            <a:r>
-              <a:rPr sz="1200" b="0" i="1">
-                <a:solidFill>
-                  <a:srgbClr val="2B2B2B"/>
-                </a:solidFill>
-                <a:latin typeface="Calibri"/>
-              </a:rPr>
-              <a:t>: absolutamente todo lo de hoy cuelga de ella.</a:t>
             </a:r>
           </a:p>
         </p:txBody>
